--- a/poster/BMI6313_TEFCA_Poster_Jordan_Pulaski.pptx
+++ b/poster/BMI6313_TEFCA_Poster_Jordan_Pulaski.pptx
@@ -221,6 +221,227 @@
     </p:ext>
   </p:extLst>
 </p:presentation>
+</file>
+
+<file path=ppt/revisionInfo.xml><?xml version="1.0" encoding="utf-8"?>
+<p1510:revInfo xmlns:a="http://schemas.openxmlformats.org/drawingml/2006/main" xmlns:r="http://schemas.openxmlformats.org/officeDocument/2006/relationships" xmlns:p1510="http://schemas.microsoft.com/office/powerpoint/2015/10/main">
+  <p1510:revLst>
+    <p1510:client id="{ECF8852F-3FCF-4736-A5DC-07A8B6B99125}" v="16" dt="2026-07-27T21:13:31.040"/>
+  </p1510:revLst>
+</p1510:revInfo>
+</file>
+
+<file path=ppt/changesInfos/changesInfo1.xml><?xml version="1.0" encoding="utf-8"?>
+<pc:chgInfo xmlns:a="http://schemas.openxmlformats.org/drawingml/2006/main" xmlns:r="http://schemas.openxmlformats.org/officeDocument/2006/relationships" xmlns:ac="http://schemas.microsoft.com/office/drawing/2013/main/command" xmlns:pc="http://schemas.microsoft.com/office/powerpoint/2013/main/command">
+  <pc:docChgLst>
+    <pc:chgData name="Pulaski, Jordan A" userId="b59e5678-eb70-4bba-8605-0c3b286199fc" providerId="ADAL" clId="{ECF8852F-3FCF-4736-A5DC-07A8B6B99125}"/>
+    <pc:docChg chg="undo redo custSel modSld">
+      <pc:chgData name="Pulaski, Jordan A" userId="b59e5678-eb70-4bba-8605-0c3b286199fc" providerId="ADAL" clId="{ECF8852F-3FCF-4736-A5DC-07A8B6B99125}" dt="2026-07-27T21:18:49.644" v="400" actId="20577"/>
+      <pc:docMkLst>
+        <pc:docMk/>
+      </pc:docMkLst>
+      <pc:sldChg chg="addSp delSp modSp mod">
+        <pc:chgData name="Pulaski, Jordan A" userId="b59e5678-eb70-4bba-8605-0c3b286199fc" providerId="ADAL" clId="{ECF8852F-3FCF-4736-A5DC-07A8B6B99125}" dt="2026-07-27T21:18:49.644" v="400" actId="20577"/>
+        <pc:sldMkLst>
+          <pc:docMk/>
+          <pc:sldMk cId="0" sldId="256"/>
+        </pc:sldMkLst>
+        <pc:spChg chg="mod">
+          <ac:chgData name="Pulaski, Jordan A" userId="b59e5678-eb70-4bba-8605-0c3b286199fc" providerId="ADAL" clId="{ECF8852F-3FCF-4736-A5DC-07A8B6B99125}" dt="2026-07-27T20:41:04.191" v="160" actId="255"/>
+          <ac:spMkLst>
+            <pc:docMk/>
+            <pc:sldMk cId="0" sldId="256"/>
+            <ac:spMk id="11" creationId="{5B86F263-CCBD-8F74-7C4A-DA7AE3E35802}"/>
+          </ac:spMkLst>
+        </pc:spChg>
+        <pc:spChg chg="mod">
+          <ac:chgData name="Pulaski, Jordan A" userId="b59e5678-eb70-4bba-8605-0c3b286199fc" providerId="ADAL" clId="{ECF8852F-3FCF-4736-A5DC-07A8B6B99125}" dt="2026-07-27T20:36:35.512" v="147" actId="1076"/>
+          <ac:spMkLst>
+            <pc:docMk/>
+            <pc:sldMk cId="0" sldId="256"/>
+            <ac:spMk id="16" creationId="{74FE048F-31DE-1509-501D-9CA3376B31BF}"/>
+          </ac:spMkLst>
+        </pc:spChg>
+        <pc:spChg chg="mod">
+          <ac:chgData name="Pulaski, Jordan A" userId="b59e5678-eb70-4bba-8605-0c3b286199fc" providerId="ADAL" clId="{ECF8852F-3FCF-4736-A5DC-07A8B6B99125}" dt="2026-07-27T20:41:07.598" v="161" actId="255"/>
+          <ac:spMkLst>
+            <pc:docMk/>
+            <pc:sldMk cId="0" sldId="256"/>
+            <ac:spMk id="18" creationId="{4D8920F3-11E9-EDDF-8C4B-DD0C8E7CB750}"/>
+          </ac:spMkLst>
+        </pc:spChg>
+        <pc:spChg chg="mod">
+          <ac:chgData name="Pulaski, Jordan A" userId="b59e5678-eb70-4bba-8605-0c3b286199fc" providerId="ADAL" clId="{ECF8852F-3FCF-4736-A5DC-07A8B6B99125}" dt="2026-07-27T21:18:42.669" v="398" actId="20577"/>
+          <ac:spMkLst>
+            <pc:docMk/>
+            <pc:sldMk cId="0" sldId="256"/>
+            <ac:spMk id="21" creationId="{00000000-0000-0000-0000-000000000000}"/>
+          </ac:spMkLst>
+        </pc:spChg>
+        <pc:spChg chg="mod">
+          <ac:chgData name="Pulaski, Jordan A" userId="b59e5678-eb70-4bba-8605-0c3b286199fc" providerId="ADAL" clId="{ECF8852F-3FCF-4736-A5DC-07A8B6B99125}" dt="2026-07-27T20:40:34.675" v="157" actId="1076"/>
+          <ac:spMkLst>
+            <pc:docMk/>
+            <pc:sldMk cId="0" sldId="256"/>
+            <ac:spMk id="25" creationId="{00000000-0000-0000-0000-000000000000}"/>
+          </ac:spMkLst>
+        </pc:spChg>
+        <pc:spChg chg="mod">
+          <ac:chgData name="Pulaski, Jordan A" userId="b59e5678-eb70-4bba-8605-0c3b286199fc" providerId="ADAL" clId="{ECF8852F-3FCF-4736-A5DC-07A8B6B99125}" dt="2026-07-27T20:49:51.204" v="218" actId="14100"/>
+          <ac:spMkLst>
+            <pc:docMk/>
+            <pc:sldMk cId="0" sldId="256"/>
+            <ac:spMk id="27" creationId="{00000000-0000-0000-0000-000000000000}"/>
+          </ac:spMkLst>
+        </pc:spChg>
+        <pc:spChg chg="mod">
+          <ac:chgData name="Pulaski, Jordan A" userId="b59e5678-eb70-4bba-8605-0c3b286199fc" providerId="ADAL" clId="{ECF8852F-3FCF-4736-A5DC-07A8B6B99125}" dt="2026-07-27T21:03:13.694" v="230"/>
+          <ac:spMkLst>
+            <pc:docMk/>
+            <pc:sldMk cId="0" sldId="256"/>
+            <ac:spMk id="30" creationId="{00000000-0000-0000-0000-000000000000}"/>
+          </ac:spMkLst>
+        </pc:spChg>
+        <pc:spChg chg="mod">
+          <ac:chgData name="Pulaski, Jordan A" userId="b59e5678-eb70-4bba-8605-0c3b286199fc" providerId="ADAL" clId="{ECF8852F-3FCF-4736-A5DC-07A8B6B99125}" dt="2026-07-27T20:48:21.032" v="208" actId="14100"/>
+          <ac:spMkLst>
+            <pc:docMk/>
+            <pc:sldMk cId="0" sldId="256"/>
+            <ac:spMk id="33" creationId="{00000000-0000-0000-0000-000000000000}"/>
+          </ac:spMkLst>
+        </pc:spChg>
+        <pc:spChg chg="mod">
+          <ac:chgData name="Pulaski, Jordan A" userId="b59e5678-eb70-4bba-8605-0c3b286199fc" providerId="ADAL" clId="{ECF8852F-3FCF-4736-A5DC-07A8B6B99125}" dt="2026-07-27T21:14:23.637" v="362" actId="1076"/>
+          <ac:spMkLst>
+            <pc:docMk/>
+            <pc:sldMk cId="0" sldId="256"/>
+            <ac:spMk id="34" creationId="{00000000-0000-0000-0000-000000000000}"/>
+          </ac:spMkLst>
+        </pc:spChg>
+        <pc:spChg chg="mod">
+          <ac:chgData name="Pulaski, Jordan A" userId="b59e5678-eb70-4bba-8605-0c3b286199fc" providerId="ADAL" clId="{ECF8852F-3FCF-4736-A5DC-07A8B6B99125}" dt="2026-07-27T21:18:49.644" v="400" actId="20577"/>
+          <ac:spMkLst>
+            <pc:docMk/>
+            <pc:sldMk cId="0" sldId="256"/>
+            <ac:spMk id="35" creationId="{00000000-0000-0000-0000-000000000000}"/>
+          </ac:spMkLst>
+        </pc:spChg>
+        <pc:spChg chg="mod">
+          <ac:chgData name="Pulaski, Jordan A" userId="b59e5678-eb70-4bba-8605-0c3b286199fc" providerId="ADAL" clId="{ECF8852F-3FCF-4736-A5DC-07A8B6B99125}" dt="2026-07-27T21:04:10.194" v="234" actId="14100"/>
+          <ac:spMkLst>
+            <pc:docMk/>
+            <pc:sldMk cId="0" sldId="256"/>
+            <ac:spMk id="36" creationId="{00000000-0000-0000-0000-000000000000}"/>
+          </ac:spMkLst>
+        </pc:spChg>
+        <pc:spChg chg="mod">
+          <ac:chgData name="Pulaski, Jordan A" userId="b59e5678-eb70-4bba-8605-0c3b286199fc" providerId="ADAL" clId="{ECF8852F-3FCF-4736-A5DC-07A8B6B99125}" dt="2026-07-27T20:40:52.590" v="159" actId="255"/>
+          <ac:spMkLst>
+            <pc:docMk/>
+            <pc:sldMk cId="0" sldId="256"/>
+            <ac:spMk id="61" creationId="{2EDA1001-BDAB-96D5-C6E6-759B2635D8C1}"/>
+          </ac:spMkLst>
+        </pc:spChg>
+        <pc:spChg chg="mod">
+          <ac:chgData name="Pulaski, Jordan A" userId="b59e5678-eb70-4bba-8605-0c3b286199fc" providerId="ADAL" clId="{ECF8852F-3FCF-4736-A5DC-07A8B6B99125}" dt="2026-07-27T20:50:29.901" v="222" actId="1076"/>
+          <ac:spMkLst>
+            <pc:docMk/>
+            <pc:sldMk cId="0" sldId="256"/>
+            <ac:spMk id="1025" creationId="{1A4C4739-BF4A-89E8-7CF5-5DB5D1B45FAE}"/>
+          </ac:spMkLst>
+        </pc:spChg>
+        <pc:spChg chg="mod">
+          <ac:chgData name="Pulaski, Jordan A" userId="b59e5678-eb70-4bba-8605-0c3b286199fc" providerId="ADAL" clId="{ECF8852F-3FCF-4736-A5DC-07A8B6B99125}" dt="2026-07-27T21:14:38.167" v="363" actId="1076"/>
+          <ac:spMkLst>
+            <pc:docMk/>
+            <pc:sldMk cId="0" sldId="256"/>
+            <ac:spMk id="1033" creationId="{FDB23A6E-5FE5-7133-FBB7-85483EC23619}"/>
+          </ac:spMkLst>
+        </pc:spChg>
+        <pc:spChg chg="mod">
+          <ac:chgData name="Pulaski, Jordan A" userId="b59e5678-eb70-4bba-8605-0c3b286199fc" providerId="ADAL" clId="{ECF8852F-3FCF-4736-A5DC-07A8B6B99125}" dt="2026-07-27T20:41:27.079" v="163" actId="1076"/>
+          <ac:spMkLst>
+            <pc:docMk/>
+            <pc:sldMk cId="0" sldId="256"/>
+            <ac:spMk id="1039" creationId="{E0E0A4BE-228B-5BEB-54BA-52C613362C28}"/>
+          </ac:spMkLst>
+        </pc:spChg>
+        <pc:spChg chg="mod">
+          <ac:chgData name="Pulaski, Jordan A" userId="b59e5678-eb70-4bba-8605-0c3b286199fc" providerId="ADAL" clId="{ECF8852F-3FCF-4736-A5DC-07A8B6B99125}" dt="2026-07-27T20:36:40.596" v="148" actId="14100"/>
+          <ac:spMkLst>
+            <pc:docMk/>
+            <pc:sldMk cId="0" sldId="256"/>
+            <ac:spMk id="1052" creationId="{ECAF7F30-4242-F28F-CC63-2CF9D23A54BF}"/>
+          </ac:spMkLst>
+        </pc:spChg>
+        <pc:spChg chg="add del mod">
+          <ac:chgData name="Pulaski, Jordan A" userId="b59e5678-eb70-4bba-8605-0c3b286199fc" providerId="ADAL" clId="{ECF8852F-3FCF-4736-A5DC-07A8B6B99125}" dt="2026-07-27T21:04:33.784" v="258" actId="478"/>
+          <ac:spMkLst>
+            <pc:docMk/>
+            <pc:sldMk cId="0" sldId="256"/>
+            <ac:spMk id="1066" creationId="{A9AC913A-78A9-B672-DD13-D3B761320305}"/>
+          </ac:spMkLst>
+        </pc:spChg>
+        <pc:spChg chg="add mod">
+          <ac:chgData name="Pulaski, Jordan A" userId="b59e5678-eb70-4bba-8605-0c3b286199fc" providerId="ADAL" clId="{ECF8852F-3FCF-4736-A5DC-07A8B6B99125}" dt="2026-07-27T21:11:39.113" v="345" actId="1076"/>
+          <ac:spMkLst>
+            <pc:docMk/>
+            <pc:sldMk cId="0" sldId="256"/>
+            <ac:spMk id="1067" creationId="{90FF7E03-AF81-5A22-01FA-EF6B8005E07B}"/>
+          </ac:spMkLst>
+        </pc:spChg>
+        <pc:spChg chg="add del mod">
+          <ac:chgData name="Pulaski, Jordan A" userId="b59e5678-eb70-4bba-8605-0c3b286199fc" providerId="ADAL" clId="{ECF8852F-3FCF-4736-A5DC-07A8B6B99125}" dt="2026-07-27T21:06:54.980" v="266" actId="478"/>
+          <ac:spMkLst>
+            <pc:docMk/>
+            <pc:sldMk cId="0" sldId="256"/>
+            <ac:spMk id="1068" creationId="{09C5D111-8D29-EF8E-7EC6-17FA88828792}"/>
+          </ac:spMkLst>
+        </pc:spChg>
+        <pc:spChg chg="add mod">
+          <ac:chgData name="Pulaski, Jordan A" userId="b59e5678-eb70-4bba-8605-0c3b286199fc" providerId="ADAL" clId="{ECF8852F-3FCF-4736-A5DC-07A8B6B99125}" dt="2026-07-27T21:13:31.038" v="360" actId="1076"/>
+          <ac:spMkLst>
+            <pc:docMk/>
+            <pc:sldMk cId="0" sldId="256"/>
+            <ac:spMk id="1069" creationId="{1119BEB3-184E-0733-EF53-DC6A69720D61}"/>
+          </ac:spMkLst>
+        </pc:spChg>
+        <pc:spChg chg="mod">
+          <ac:chgData name="Pulaski, Jordan A" userId="b59e5678-eb70-4bba-8605-0c3b286199fc" providerId="ADAL" clId="{ECF8852F-3FCF-4736-A5DC-07A8B6B99125}" dt="2026-07-27T20:34:21.247" v="132" actId="1076"/>
+          <ac:spMkLst>
+            <pc:docMk/>
+            <pc:sldMk cId="0" sldId="256"/>
+            <ac:spMk id="2051" creationId="{00000000-0000-0000-0000-000000000000}"/>
+          </ac:spMkLst>
+        </pc:spChg>
+        <pc:spChg chg="mod">
+          <ac:chgData name="Pulaski, Jordan A" userId="b59e5678-eb70-4bba-8605-0c3b286199fc" providerId="ADAL" clId="{ECF8852F-3FCF-4736-A5DC-07A8B6B99125}" dt="2026-07-27T20:36:46.429" v="149" actId="14100"/>
+          <ac:spMkLst>
+            <pc:docMk/>
+            <pc:sldMk cId="0" sldId="256"/>
+            <ac:spMk id="2057" creationId="{00000000-0000-0000-0000-000000000000}"/>
+          </ac:spMkLst>
+        </pc:spChg>
+        <pc:picChg chg="mod">
+          <ac:chgData name="Pulaski, Jordan A" userId="b59e5678-eb70-4bba-8605-0c3b286199fc" providerId="ADAL" clId="{ECF8852F-3FCF-4736-A5DC-07A8B6B99125}" dt="2026-07-27T20:34:08.153" v="130" actId="14100"/>
+          <ac:picMkLst>
+            <pc:docMk/>
+            <pc:sldMk cId="0" sldId="256"/>
+            <ac:picMk id="2" creationId="{00000000-0000-0000-0000-000000000000}"/>
+          </ac:picMkLst>
+        </pc:picChg>
+        <pc:picChg chg="mod">
+          <ac:chgData name="Pulaski, Jordan A" userId="b59e5678-eb70-4bba-8605-0c3b286199fc" providerId="ADAL" clId="{ECF8852F-3FCF-4736-A5DC-07A8B6B99125}" dt="2026-07-27T20:48:10.069" v="207" actId="1076"/>
+          <ac:picMkLst>
+            <pc:docMk/>
+            <pc:sldMk cId="0" sldId="256"/>
+            <ac:picMk id="1064" creationId="{5D15A370-C4E4-A783-B6E2-F2E3FA2DD4C1}"/>
+          </ac:picMkLst>
+        </pc:picChg>
+      </pc:sldChg>
+    </pc:docChg>
+  </pc:docChgLst>
+</pc:chgInfo>
 </file>
 
 <file path=ppt/notesMasters/notesMaster1.xml><?xml version="1.0" encoding="utf-8"?>
@@ -4028,8 +4249,8 @@
         </p:nvSpPr>
         <p:spPr bwMode="auto">
           <a:xfrm>
-            <a:off x="365760" y="12287718"/>
-            <a:ext cx="13350240" cy="2496881"/>
+            <a:off x="329374" y="12617129"/>
+            <a:ext cx="13322618" cy="2167470"/>
           </a:xfrm>
           <a:prstGeom prst="rect">
             <a:avLst/>
@@ -4099,7 +4320,7 @@
         <p:spPr bwMode="auto">
           <a:xfrm>
             <a:off x="33147000" y="15653358"/>
-            <a:ext cx="9939528" cy="11550042"/>
+            <a:ext cx="9939528" cy="6955300"/>
           </a:xfrm>
           <a:prstGeom prst="rect">
             <a:avLst/>
@@ -4243,7 +4464,7 @@
         <p:spPr>
           <a:xfrm>
             <a:off x="914400" y="248488"/>
-            <a:ext cx="5486400" cy="5480913"/>
+            <a:ext cx="4917421" cy="4912503"/>
           </a:xfrm>
           <a:prstGeom prst="rect">
             <a:avLst/>
@@ -4301,8 +4522,8 @@
         </p:nvSpPr>
         <p:spPr bwMode="auto">
           <a:xfrm>
-            <a:off x="587828" y="14859000"/>
-            <a:ext cx="20671971" cy="794358"/>
+            <a:off x="329374" y="14859000"/>
+            <a:ext cx="20930425" cy="794358"/>
           </a:xfrm>
           <a:prstGeom prst="rect">
             <a:avLst/>
@@ -4538,8 +4759,8 @@
         </p:nvSpPr>
         <p:spPr bwMode="auto">
           <a:xfrm>
-            <a:off x="26517600" y="5279824"/>
-            <a:ext cx="16568928" cy="808278"/>
+            <a:off x="29632703" y="5279824"/>
+            <a:ext cx="13453824" cy="801867"/>
           </a:xfrm>
           <a:prstGeom prst="rect">
             <a:avLst/>
@@ -4596,8 +4817,8 @@
         </p:nvSpPr>
         <p:spPr bwMode="auto">
           <a:xfrm>
-            <a:off x="26462255" y="6341858"/>
-            <a:ext cx="8458200" cy="5857283"/>
+            <a:off x="29654543" y="6087637"/>
+            <a:ext cx="6714697" cy="7426943"/>
           </a:xfrm>
           <a:prstGeom prst="rect">
             <a:avLst/>
@@ -4662,8 +4883,8 @@
         </p:nvSpPr>
         <p:spPr bwMode="auto">
           <a:xfrm>
-            <a:off x="365760" y="5954714"/>
-            <a:ext cx="13350240" cy="808277"/>
+            <a:off x="365760" y="5290931"/>
+            <a:ext cx="13578840" cy="794358"/>
           </a:xfrm>
           <a:prstGeom prst="rect">
             <a:avLst/>
@@ -4713,7 +4934,7 @@
         <p:spPr bwMode="auto">
           <a:xfrm>
             <a:off x="14173200" y="5281083"/>
-            <a:ext cx="11887200" cy="794358"/>
+            <a:ext cx="15122516" cy="794358"/>
           </a:xfrm>
           <a:prstGeom prst="rect">
             <a:avLst/>
@@ -4770,8 +4991,8 @@
         </p:nvSpPr>
         <p:spPr bwMode="auto">
           <a:xfrm>
-            <a:off x="14109192" y="11915390"/>
-            <a:ext cx="11887200" cy="2841073"/>
+            <a:off x="14263394" y="10867370"/>
+            <a:ext cx="15032322" cy="4018318"/>
           </a:xfrm>
           <a:prstGeom prst="rect">
             <a:avLst/>
@@ -4796,14 +5017,14 @@
               </a:spcBef>
             </a:pPr>
             <a:r>
-              <a:rPr lang="en-US" sz="2800" b="1" dirty="0">
+              <a:rPr lang="en-US" sz="2700" b="1" dirty="0">
                 <a:latin typeface="Arial" pitchFamily="34" charset="0"/>
                 <a:cs typeface="Arial" pitchFamily="34" charset="0"/>
               </a:rPr>
               <a:t>Figure 1. </a:t>
             </a:r>
             <a:r>
-              <a:rPr lang="en-US" sz="2800" dirty="0">
+              <a:rPr lang="en-US" sz="2700" dirty="0">
                 <a:latin typeface="Arial" pitchFamily="34" charset="0"/>
                 <a:cs typeface="Arial" pitchFamily="34" charset="0"/>
               </a:rPr>
@@ -4817,18 +5038,53 @@
               </a:spcBef>
             </a:pPr>
             <a:r>
-              <a:rPr lang="en-US" sz="3200" dirty="0">
+              <a:rPr lang="en-US" sz="3400" dirty="0">
                 <a:latin typeface="Arial" pitchFamily="34" charset="0"/>
                 <a:cs typeface="Arial" pitchFamily="34" charset="0"/>
               </a:rPr>
-              <a:t>Models adjusted for national-network, EHR vendor-network, and HIO participation; log CMS denominator; state; and survey year</a:t>
-            </a:r>
-            <a:r>
-              <a:rPr lang="en-US" sz="2600" dirty="0">
+              <a:t>Hospital-level ONC survey data (2023–2024)</a:t>
+            </a:r>
+            <a:r>
+              <a:rPr lang="en-US" sz="3400" baseline="30000" dirty="0">
                 <a:latin typeface="Arial" pitchFamily="34" charset="0"/>
                 <a:cs typeface="Arial" pitchFamily="34" charset="0"/>
               </a:rPr>
-              <a:t>.</a:t>
+              <a:t>12</a:t>
+            </a:r>
+            <a:r>
+              <a:rPr lang="en-US" sz="3400" dirty="0">
+                <a:latin typeface="Arial" pitchFamily="34" charset="0"/>
+                <a:cs typeface="Arial" pitchFamily="34" charset="0"/>
+              </a:rPr>
+              <a:t> were linked to CMS Hybrid HWM data (7/1/2023–6/30/2024) and heart failure/pneumonia mortality data </a:t>
+            </a:r>
+            <a:r>
+              <a:rPr lang="en-US" sz="3400">
+                <a:latin typeface="Arial" pitchFamily="34" charset="0"/>
+                <a:cs typeface="Arial" pitchFamily="34" charset="0"/>
+              </a:rPr>
+              <a:t>(7/1/2021–6/30/2024).</a:t>
+            </a:r>
+            <a:r>
+              <a:rPr lang="en-US" sz="3400" baseline="30000">
+                <a:latin typeface="Arial" pitchFamily="34" charset="0"/>
+                <a:cs typeface="Arial" pitchFamily="34" charset="0"/>
+              </a:rPr>
+              <a:t>13</a:t>
+            </a:r>
+            <a:r>
+              <a:rPr lang="en-US" sz="3400">
+                <a:latin typeface="Arial" pitchFamily="34" charset="0"/>
+                <a:cs typeface="Arial" pitchFamily="34" charset="0"/>
+              </a:rPr>
+              <a:t> </a:t>
+            </a:r>
+            <a:r>
+              <a:rPr lang="en-US" sz="3400" dirty="0">
+                <a:latin typeface="Arial" pitchFamily="34" charset="0"/>
+                <a:cs typeface="Arial" pitchFamily="34" charset="0"/>
+              </a:rPr>
+              <a:t>Adjusted OLS models compared current and neither status with planned participation, controlling for national network, EHR vendor network, and HIO participation, log CMS denominator, state, and survey year</a:t>
             </a:r>
           </a:p>
           <a:p>
@@ -4838,14 +5094,14 @@
               </a:spcBef>
             </a:pPr>
             <a:r>
-              <a:rPr lang="en-US" sz="2800" i="1" dirty="0">
+              <a:rPr lang="en-US" sz="2700" i="1" dirty="0">
                 <a:latin typeface="Arial" pitchFamily="34" charset="0"/>
                 <a:cs typeface="Arial" pitchFamily="34" charset="0"/>
               </a:rPr>
               <a:t>Note. </a:t>
             </a:r>
             <a:r>
-              <a:rPr lang="en-US" sz="2800" dirty="0">
+              <a:rPr lang="en-US" sz="2700" dirty="0">
                 <a:latin typeface="Arial" pitchFamily="34" charset="0"/>
                 <a:cs typeface="Arial" pitchFamily="34" charset="0"/>
               </a:rPr>
@@ -4980,8 +5236,8 @@
         </p:nvSpPr>
         <p:spPr bwMode="auto">
           <a:xfrm>
-            <a:off x="365760" y="6808803"/>
-            <a:ext cx="13350240" cy="5595673"/>
+            <a:off x="347567" y="6047861"/>
+            <a:ext cx="13578840" cy="6642113"/>
           </a:xfrm>
           <a:prstGeom prst="rect">
             <a:avLst/>
@@ -5010,7 +5266,28 @@
                 <a:latin typeface="Arial" pitchFamily="34" charset="0"/>
                 <a:cs typeface="Arial" pitchFamily="34" charset="0"/>
               </a:rPr>
-              <a:t>The Trusted Exchange Framework and Common Agreement (TEFCA) was established to support nationwide electronic health information exchange through a network-of-networks via Qualified Health Information Networks (QHINs). But evidence about hospital outcomes during its early implementation remains limited.</a:t>
+              <a:t>The Trusted Exchange Framework and Common Agreement (TEFCA) was established to support nationwide electronic health information exchange (HIE) through a network-of-networks of Qualified Health Information Networks (QHINs).</a:t>
+            </a:r>
+            <a:r>
+              <a:rPr lang="en-US" sz="3400" baseline="30000" dirty="0">
+                <a:latin typeface="Arial" pitchFamily="34" charset="0"/>
+                <a:cs typeface="Arial" pitchFamily="34" charset="0"/>
+              </a:rPr>
+              <a:t>1</a:t>
+            </a:r>
+            <a:r>
+              <a:rPr lang="en-US" sz="3400" dirty="0">
+                <a:latin typeface="Arial" pitchFamily="34" charset="0"/>
+                <a:cs typeface="Arial" pitchFamily="34" charset="0"/>
+              </a:rPr>
+              <a:t> Prior HIE research has reported operational and utilization benefits, but evidence for mortality remains limited and largely observational, particularly during TEFCA’s early implementation.</a:t>
+            </a:r>
+            <a:r>
+              <a:rPr lang="en-US" sz="3400" baseline="30000" dirty="0">
+                <a:latin typeface="Arial" pitchFamily="34" charset="0"/>
+                <a:cs typeface="Arial" pitchFamily="34" charset="0"/>
+              </a:rPr>
+              <a:t>2–11 </a:t>
             </a:r>
           </a:p>
           <a:p>
@@ -5024,14 +5301,14 @@
                 <a:latin typeface="Arial" pitchFamily="34" charset="0"/>
                 <a:cs typeface="Arial" pitchFamily="34" charset="0"/>
               </a:rPr>
-              <a:t>Objective: </a:t>
+              <a:t>Objective</a:t>
             </a:r>
             <a:r>
               <a:rPr lang="en-US" sz="3400" dirty="0">
                 <a:latin typeface="Arial" pitchFamily="34" charset="0"/>
                 <a:cs typeface="Arial" pitchFamily="34" charset="0"/>
               </a:rPr>
-              <a:t>Examine whether TEFCA participation, compared with planned participation, was associated with CMS Hybrid Hospital-Wide 30-Day Mortality among U.S. non-federal acute care hospitals. Heart failure and pneumonia mortality were evaluated as secondary outcomes.</a:t>
+              <a:t>: Examine whether current TEFCA participation, compared with planned participation, was associated with lower CMS Hybrid Hospital-Wide Mortality (Hybrid HWM) scores among U.S. non-federal acute care hospitals. Heart failure and pneumonia mortality were evaluated as secondary outcomes.</a:t>
             </a:r>
           </a:p>
         </p:txBody>
@@ -5047,7 +5324,7 @@
         <p:spPr bwMode="auto">
           <a:xfrm>
             <a:off x="33357312" y="15762301"/>
-            <a:ext cx="9509760" cy="11351094"/>
+            <a:ext cx="9509760" cy="6903723"/>
           </a:xfrm>
           <a:prstGeom prst="rect">
             <a:avLst/>
@@ -5076,21 +5353,7 @@
                 <a:latin typeface="Arial" pitchFamily="34" charset="0"/>
                 <a:cs typeface="Arial" pitchFamily="34" charset="0"/>
               </a:rPr>
-              <a:t>In this early hospital-level analysis, current TEFCA participation was not robustly associated with lower mortality than planned participation. The small positive Hybrid HWM estimate was sensitive to the standard-error method and was not reproduced for heart failure or pneumonia mortality; therefore, it should not be interpreted as evidence that TEFCA increased mortality.</a:t>
-            </a:r>
-          </a:p>
-          <a:p>
-            <a:pPr defTabSz="3458871">
-              <a:spcBef>
-                <a:spcPct val="50000"/>
-              </a:spcBef>
-            </a:pPr>
-            <a:r>
-              <a:rPr lang="en-US" sz="3400" dirty="0">
-                <a:latin typeface="Arial" pitchFamily="34" charset="0"/>
-                <a:cs typeface="Arial" pitchFamily="34" charset="0"/>
-              </a:rPr>
-              <a:t>Because planned hospitals could already participate in other exchange networks, this was not a comparison of TEFCA with no electronic exchange. EHR vendor-network participation was associated with lower Hybrid HWM, suggesting—but not proving—that more established exchange infrastructure or workflow integration may be relevant. Overall, reported participation alone may be an incomplete measure of effective information exchange. Longitudinal studies incorporating sustained TEFCA use, actual exchange activity, and later clinical outcomes are needed as implementation matures.</a:t>
+              <a:t>In this early hospital-level analysis, current TEFCA participation was not robustly associated with lower mortality than planned participation, and the small positive Hybrid HWM estimate was not reproduced across secondary outcomes. Because planned hospitals could already use other exchange networks, this was not a comparison with no electronic exchange. EHR vendor-network participation was associated with lower Hybrid HWM, but this observational finding does not establish causality. Longitudinal studies should evaluate sustained TEFCA use and actual exchange activity as implementation matures.</a:t>
             </a:r>
           </a:p>
         </p:txBody>
@@ -5171,7 +5434,7 @@
         </p:nvSpPr>
         <p:spPr bwMode="auto">
           <a:xfrm>
-            <a:off x="33203829" y="31978211"/>
+            <a:off x="33192718" y="31942617"/>
             <a:ext cx="9966962" cy="671248"/>
           </a:xfrm>
           <a:prstGeom prst="rect">
@@ -6015,7 +6278,7 @@
         <p:spPr>
           <a:xfrm>
             <a:off x="365839" y="22962128"/>
-            <a:ext cx="21652415" cy="584775"/>
+            <a:ext cx="21652415" cy="507831"/>
           </a:xfrm>
           <a:prstGeom prst="rect">
             <a:avLst/>
@@ -6029,11 +6292,11 @@
           <a:lstStyle/>
           <a:p>
             <a:r>
-              <a:rPr lang="en-US" sz="3200" i="1" dirty="0"/>
+              <a:rPr lang="en-US" sz="2700" i="1" dirty="0"/>
               <a:t>Note. </a:t>
             </a:r>
             <a:r>
-              <a:rPr lang="en-US" sz="3200" dirty="0"/>
+              <a:rPr lang="en-US" sz="2700" dirty="0"/>
               <a:t>Positive coefficients indicate higher mortality values; planned TEFCA participation was the reference category.</a:t>
             </a:r>
           </a:p>
@@ -6053,7 +6316,7 @@
         </p:nvSpPr>
         <p:spPr>
           <a:xfrm>
-            <a:off x="1257300" y="12469761"/>
+            <a:off x="1257300" y="12631666"/>
             <a:ext cx="11201400" cy="584775"/>
           </a:xfrm>
           <a:prstGeom prst="rect">
@@ -6113,11 +6376,11 @@
           <a:lstStyle/>
           <a:p>
             <a:r>
-              <a:rPr lang="en-US" sz="2800" b="1" dirty="0"/>
+              <a:rPr lang="en-US" sz="2700" b="1" dirty="0"/>
               <a:t>Figure 2. </a:t>
             </a:r>
             <a:r>
-              <a:rPr lang="en-US" sz="2800" dirty="0"/>
+              <a:rPr lang="en-US" sz="2700" dirty="0"/>
               <a:t>Adjusted associations with Hybrid HWM</a:t>
             </a:r>
           </a:p>
@@ -6498,11 +6761,11 @@
           <a:lstStyle/>
           <a:p>
             <a:r>
-              <a:rPr lang="en-US" sz="2800" b="1" dirty="0"/>
+              <a:rPr lang="en-US" sz="2700" b="1" dirty="0"/>
               <a:t>Table 1. </a:t>
             </a:r>
             <a:r>
-              <a:rPr lang="en-US" sz="2800" dirty="0"/>
+              <a:rPr lang="en-US" sz="2700" dirty="0"/>
               <a:t>TEFCA Participation Estimates Across Mortality Analyses</a:t>
             </a:r>
           </a:p>
@@ -6522,8 +6785,8 @@
         </p:nvSpPr>
         <p:spPr>
           <a:xfrm>
-            <a:off x="35309164" y="6262867"/>
-            <a:ext cx="7777363" cy="5847755"/>
+            <a:off x="36845849" y="6083718"/>
+            <a:ext cx="6240678" cy="7417415"/>
           </a:xfrm>
           <a:prstGeom prst="rect">
             <a:avLst/>
@@ -6593,8 +6856,8 @@
         </p:nvSpPr>
         <p:spPr>
           <a:xfrm>
-            <a:off x="26590752" y="12635211"/>
-            <a:ext cx="16568928" cy="1569660"/>
+            <a:off x="29632703" y="13469455"/>
+            <a:ext cx="13453824" cy="1338828"/>
           </a:xfrm>
           <a:prstGeom prst="rect">
             <a:avLst/>
@@ -6610,7 +6873,7 @@
           <a:lstStyle/>
           <a:p>
             <a:r>
-              <a:rPr lang="en-US" sz="3200" b="1" dirty="0"/>
+              <a:rPr lang="en-US" sz="2700" b="1" dirty="0"/>
               <a:t>Key finding: The analyses did not provide robust evidence that early current TEFCA participation was associated with lower hospital mortality than planned participation.</a:t>
             </a:r>
           </a:p>
@@ -6630,8 +6893,8 @@
         </p:nvSpPr>
         <p:spPr>
           <a:xfrm>
-            <a:off x="365760" y="31841182"/>
-            <a:ext cx="20711159" cy="1077218"/>
+            <a:off x="520017" y="31893924"/>
+            <a:ext cx="20711159" cy="923330"/>
           </a:xfrm>
           <a:prstGeom prst="rect">
             <a:avLst/>
@@ -6645,11 +6908,11 @@
           <a:lstStyle/>
           <a:p>
             <a:r>
-              <a:rPr lang="en-US" sz="3200" i="1" dirty="0"/>
+              <a:rPr lang="en-US" sz="2700" i="1" dirty="0"/>
               <a:t>Note. </a:t>
             </a:r>
             <a:r>
-              <a:rPr lang="en-US" sz="3200" dirty="0"/>
+              <a:rPr lang="en-US" sz="2700" dirty="0"/>
               <a:t>Points represent adjusted OLS coefficients; error bars represent 95% confidence intervals. Planned TEFCA participation was the reference category.</a:t>
             </a:r>
           </a:p>
@@ -6794,14 +7057,1121 @@
         </p:blipFill>
         <p:spPr>
           <a:xfrm>
-            <a:off x="14164449" y="6728346"/>
-            <a:ext cx="11889384" cy="4816957"/>
+            <a:off x="15354520" y="6117946"/>
+            <a:ext cx="11810558" cy="4785021"/>
           </a:xfrm>
           <a:prstGeom prst="rect">
             <a:avLst/>
           </a:prstGeom>
         </p:spPr>
       </p:pic>
+      <p:sp>
+        <p:nvSpPr>
+          <p:cNvPr id="1067" name="Text Box 45">
+            <a:extLst>
+              <a:ext uri="{FF2B5EF4-FFF2-40B4-BE49-F238E27FC236}">
+                <a16:creationId xmlns:a16="http://schemas.microsoft.com/office/drawing/2014/main" id="{90FF7E03-AF81-5A22-01FA-EF6B8005E07B}"/>
+              </a:ext>
+            </a:extLst>
+          </p:cNvPr>
+          <p:cNvSpPr txBox="1">
+            <a:spLocks noChangeArrowheads="1"/>
+          </p:cNvSpPr>
+          <p:nvPr/>
+        </p:nvSpPr>
+        <p:spPr bwMode="auto">
+          <a:xfrm>
+            <a:off x="33167213" y="22767459"/>
+            <a:ext cx="9939528" cy="808277"/>
+          </a:xfrm>
+          <a:prstGeom prst="rect">
+            <a:avLst/>
+          </a:prstGeom>
+          <a:solidFill>
+            <a:srgbClr val="AE6042"/>
+          </a:solidFill>
+          <a:ln w="12700">
+            <a:noFill/>
+            <a:miter lim="800000"/>
+            <a:headEnd/>
+            <a:tailEnd/>
+          </a:ln>
+        </p:spPr>
+        <p:txBody>
+          <a:bodyPr wrap="square" lIns="100875" tIns="50438" rIns="100875" bIns="50438" anchor="ctr">
+            <a:spAutoFit/>
+          </a:bodyPr>
+          <a:lstStyle>
+            <a:defPPr>
+              <a:defRPr lang="en-US"/>
+            </a:defPPr>
+            <a:lvl1pPr algn="ctr" defTabSz="5016500">
+              <a:spcBef>
+                <a:spcPct val="50000"/>
+              </a:spcBef>
+              <a:defRPr sz="3600">
+                <a:solidFill>
+                  <a:schemeClr val="bg1"/>
+                </a:solidFill>
+                <a:latin typeface="Calibri" pitchFamily="34" charset="0"/>
+                <a:cs typeface="Calibri" pitchFamily="34" charset="0"/>
+              </a:defRPr>
+            </a:lvl1pPr>
+          </a:lstStyle>
+          <a:p>
+            <a:r>
+              <a:rPr lang="en-US" sz="4500" dirty="0">
+                <a:latin typeface="Arial" pitchFamily="34" charset="0"/>
+                <a:cs typeface="Arial" pitchFamily="34" charset="0"/>
+              </a:rPr>
+              <a:t>SELECTED REFERENCES</a:t>
+            </a:r>
+          </a:p>
+        </p:txBody>
+      </p:sp>
+      <p:sp>
+        <p:nvSpPr>
+          <p:cNvPr id="1069" name="Rectangle 11">
+            <a:extLst>
+              <a:ext uri="{FF2B5EF4-FFF2-40B4-BE49-F238E27FC236}">
+                <a16:creationId xmlns:a16="http://schemas.microsoft.com/office/drawing/2014/main" id="{1119BEB3-184E-0733-EF53-DC6A69720D61}"/>
+              </a:ext>
+            </a:extLst>
+          </p:cNvPr>
+          <p:cNvSpPr>
+            <a:spLocks noChangeArrowheads="1"/>
+          </p:cNvSpPr>
+          <p:nvPr/>
+        </p:nvSpPr>
+        <p:spPr bwMode="auto">
+          <a:xfrm>
+            <a:off x="33147000" y="23317200"/>
+            <a:ext cx="9992466" cy="3970318"/>
+          </a:xfrm>
+          <a:prstGeom prst="rect">
+            <a:avLst/>
+          </a:prstGeom>
+          <a:noFill/>
+          <a:ln>
+            <a:noFill/>
+          </a:ln>
+          <a:effectLst/>
+          <a:extLst>
+            <a:ext uri="{909E8E84-426E-40DD-AFC4-6F175D3DCCD1}">
+              <a14:hiddenFill xmlns:a14="http://schemas.microsoft.com/office/drawing/2010/main">
+                <a:solidFill>
+                  <a:schemeClr val="accent1"/>
+                </a:solidFill>
+              </a14:hiddenFill>
+            </a:ext>
+            <a:ext uri="{91240B29-F687-4F45-9708-019B960494DF}">
+              <a14:hiddenLine xmlns:a14="http://schemas.microsoft.com/office/drawing/2010/main" w="9525">
+                <a:solidFill>
+                  <a:schemeClr val="tx1"/>
+                </a:solidFill>
+                <a:miter lim="800000"/>
+                <a:headEnd/>
+                <a:tailEnd/>
+              </a14:hiddenLine>
+            </a:ext>
+            <a:ext uri="{AF507438-7753-43E0-B8FC-AC1667EBCBE1}">
+              <a14:hiddenEffects xmlns:a14="http://schemas.microsoft.com/office/drawing/2010/main">
+                <a:effectLst>
+                  <a:outerShdw dist="35921" dir="2700000" algn="ctr" rotWithShape="0">
+                    <a:schemeClr val="bg2"/>
+                  </a:outerShdw>
+                </a:effectLst>
+              </a14:hiddenEffects>
+            </a:ext>
+          </a:extLst>
+        </p:spPr>
+        <p:txBody>
+          <a:bodyPr vert="horz" wrap="square" lIns="91440" tIns="45720" rIns="91440" bIns="45720" numCol="1" anchor="ctr" anchorCtr="0" compatLnSpc="1">
+            <a:prstTxWarp prst="textNoShape">
+              <a:avLst/>
+            </a:prstTxWarp>
+            <a:spAutoFit/>
+          </a:bodyPr>
+          <a:lstStyle/>
+          <a:p>
+            <a:pPr marL="342900" marR="0" lvl="0" indent="-342900" algn="l" defTabSz="914400" rtl="0" eaLnBrk="0" fontAlgn="base" latinLnBrk="0" hangingPunct="0">
+              <a:lnSpc>
+                <a:spcPct val="100000"/>
+              </a:lnSpc>
+              <a:spcBef>
+                <a:spcPct val="0"/>
+              </a:spcBef>
+              <a:spcAft>
+                <a:spcPct val="0"/>
+              </a:spcAft>
+              <a:buClrTx/>
+              <a:buSzTx/>
+              <a:buFont typeface="+mj-lt"/>
+              <a:buAutoNum type="arabicPeriod"/>
+              <a:tabLst/>
+            </a:pPr>
+            <a:endParaRPr kumimoji="0" lang="en-US" altLang="en-US" sz="1800" b="1" i="0" u="none" strike="noStrike" cap="none" normalizeH="0" baseline="0" dirty="0">
+              <a:ln>
+                <a:noFill/>
+              </a:ln>
+              <a:solidFill>
+                <a:schemeClr val="tx1"/>
+              </a:solidFill>
+              <a:effectLst/>
+              <a:latin typeface="Arial" panose="020B0604020202020204" pitchFamily="34" charset="0"/>
+            </a:endParaRPr>
+          </a:p>
+          <a:p>
+            <a:pPr marL="342900" marR="0" lvl="0" indent="-342900" algn="l" defTabSz="914400" rtl="0" eaLnBrk="0" fontAlgn="base" latinLnBrk="0" hangingPunct="0">
+              <a:lnSpc>
+                <a:spcPct val="100000"/>
+              </a:lnSpc>
+              <a:spcBef>
+                <a:spcPct val="0"/>
+              </a:spcBef>
+              <a:spcAft>
+                <a:spcPct val="0"/>
+              </a:spcAft>
+              <a:buClrTx/>
+              <a:buSzTx/>
+              <a:buFont typeface="+mj-lt"/>
+              <a:buAutoNum type="arabicPeriod"/>
+              <a:tabLst/>
+            </a:pPr>
+            <a:r>
+              <a:rPr kumimoji="0" lang="en-US" altLang="en-US" sz="1800" b="1" i="0" u="none" strike="noStrike" cap="none" normalizeH="0" baseline="0" dirty="0">
+                <a:ln>
+                  <a:noFill/>
+                </a:ln>
+                <a:solidFill>
+                  <a:schemeClr val="tx1"/>
+                </a:solidFill>
+                <a:effectLst/>
+                <a:latin typeface="Arial" panose="020B0604020202020204" pitchFamily="34" charset="0"/>
+              </a:rPr>
+              <a:t>Office of the National Coordinator for Health IT. </a:t>
+            </a:r>
+            <a:r>
+              <a:rPr kumimoji="0" lang="en-US" altLang="en-US" sz="1800" b="1" i="1" u="none" strike="noStrike" cap="none" normalizeH="0" baseline="0" dirty="0">
+                <a:ln>
+                  <a:noFill/>
+                </a:ln>
+                <a:solidFill>
+                  <a:schemeClr val="tx1"/>
+                </a:solidFill>
+                <a:effectLst/>
+                <a:latin typeface="Arial" panose="020B0604020202020204" pitchFamily="34" charset="0"/>
+              </a:rPr>
+              <a:t>TEFCA</a:t>
+            </a:r>
+            <a:r>
+              <a:rPr kumimoji="0" lang="en-US" altLang="en-US" sz="1800" b="1" i="0" u="none" strike="noStrike" cap="none" normalizeH="0" baseline="0" dirty="0">
+                <a:ln>
+                  <a:noFill/>
+                </a:ln>
+                <a:solidFill>
+                  <a:schemeClr val="tx1"/>
+                </a:solidFill>
+                <a:effectLst/>
+                <a:latin typeface="Arial" panose="020B0604020202020204" pitchFamily="34" charset="0"/>
+              </a:rPr>
+              <a:t>. 2026. </a:t>
+            </a:r>
+          </a:p>
+          <a:p>
+            <a:pPr marL="342900" marR="0" lvl="0" indent="-342900" algn="l" defTabSz="914400" rtl="0" eaLnBrk="0" fontAlgn="base" latinLnBrk="0" hangingPunct="0">
+              <a:lnSpc>
+                <a:spcPct val="100000"/>
+              </a:lnSpc>
+              <a:spcBef>
+                <a:spcPct val="0"/>
+              </a:spcBef>
+              <a:spcAft>
+                <a:spcPct val="0"/>
+              </a:spcAft>
+              <a:buClrTx/>
+              <a:buSzTx/>
+              <a:buFont typeface="+mj-lt"/>
+              <a:buAutoNum type="arabicPeriod"/>
+              <a:tabLst/>
+            </a:pPr>
+            <a:r>
+              <a:rPr kumimoji="0" lang="en-US" altLang="en-US" sz="1800" b="1" i="0" u="none" strike="noStrike" cap="none" normalizeH="0" baseline="0" dirty="0">
+                <a:ln>
+                  <a:noFill/>
+                </a:ln>
+                <a:solidFill>
+                  <a:schemeClr val="tx1"/>
+                </a:solidFill>
+                <a:effectLst/>
+                <a:latin typeface="Arial" panose="020B0604020202020204" pitchFamily="34" charset="0"/>
+              </a:rPr>
+              <a:t>Dupont S, et al. </a:t>
+            </a:r>
+            <a:r>
+              <a:rPr kumimoji="0" lang="en-US" altLang="en-US" sz="1800" b="1" i="1" u="none" strike="noStrike" cap="none" normalizeH="0" baseline="0" dirty="0">
+                <a:ln>
+                  <a:noFill/>
+                </a:ln>
+                <a:solidFill>
+                  <a:schemeClr val="tx1"/>
+                </a:solidFill>
+                <a:effectLst/>
+                <a:latin typeface="Arial" panose="020B0604020202020204" pitchFamily="34" charset="0"/>
+              </a:rPr>
+              <a:t>J Gen Intern Med.</a:t>
+            </a:r>
+            <a:r>
+              <a:rPr kumimoji="0" lang="en-US" altLang="en-US" sz="1800" b="1" i="0" u="none" strike="noStrike" cap="none" normalizeH="0" baseline="0" dirty="0">
+                <a:ln>
+                  <a:noFill/>
+                </a:ln>
+                <a:solidFill>
+                  <a:schemeClr val="tx1"/>
+                </a:solidFill>
+                <a:effectLst/>
+                <a:latin typeface="Arial" panose="020B0604020202020204" pitchFamily="34" charset="0"/>
+              </a:rPr>
+              <a:t> 2022;38:1046–1053. </a:t>
+            </a:r>
+          </a:p>
+          <a:p>
+            <a:pPr marL="342900" marR="0" lvl="0" indent="-342900" algn="l" defTabSz="914400" rtl="0" eaLnBrk="0" fontAlgn="base" latinLnBrk="0" hangingPunct="0">
+              <a:lnSpc>
+                <a:spcPct val="100000"/>
+              </a:lnSpc>
+              <a:spcBef>
+                <a:spcPct val="0"/>
+              </a:spcBef>
+              <a:spcAft>
+                <a:spcPct val="0"/>
+              </a:spcAft>
+              <a:buClrTx/>
+              <a:buSzTx/>
+              <a:buFont typeface="+mj-lt"/>
+              <a:buAutoNum type="arabicPeriod"/>
+              <a:tabLst/>
+            </a:pPr>
+            <a:r>
+              <a:rPr kumimoji="0" lang="en-US" altLang="en-US" sz="1800" b="1" i="0" u="none" strike="noStrike" cap="none" normalizeH="0" baseline="0" dirty="0">
+                <a:ln>
+                  <a:noFill/>
+                </a:ln>
+                <a:solidFill>
+                  <a:schemeClr val="tx1"/>
+                </a:solidFill>
+                <a:effectLst/>
+                <a:latin typeface="Arial" panose="020B0604020202020204" pitchFamily="34" charset="0"/>
+              </a:rPr>
+              <a:t>Everson J, et al. </a:t>
+            </a:r>
+            <a:r>
+              <a:rPr kumimoji="0" lang="en-US" altLang="en-US" sz="1800" b="1" i="1" u="none" strike="noStrike" cap="none" normalizeH="0" baseline="0" dirty="0">
+                <a:ln>
+                  <a:noFill/>
+                </a:ln>
+                <a:solidFill>
+                  <a:schemeClr val="tx1"/>
+                </a:solidFill>
+                <a:effectLst/>
+                <a:latin typeface="Arial" panose="020B0604020202020204" pitchFamily="34" charset="0"/>
+              </a:rPr>
+              <a:t>Health </a:t>
+            </a:r>
+            <a:r>
+              <a:rPr kumimoji="0" lang="en-US" altLang="en-US" sz="1800" b="1" i="1" u="none" strike="noStrike" cap="none" normalizeH="0" baseline="0" dirty="0" err="1">
+                <a:ln>
+                  <a:noFill/>
+                </a:ln>
+                <a:solidFill>
+                  <a:schemeClr val="tx1"/>
+                </a:solidFill>
+                <a:effectLst/>
+                <a:latin typeface="Arial" panose="020B0604020202020204" pitchFamily="34" charset="0"/>
+              </a:rPr>
+              <a:t>Aff</a:t>
+            </a:r>
+            <a:r>
+              <a:rPr kumimoji="0" lang="en-US" altLang="en-US" sz="1800" b="1" i="1" u="none" strike="noStrike" cap="none" normalizeH="0" baseline="0" dirty="0">
+                <a:ln>
+                  <a:noFill/>
+                </a:ln>
+                <a:solidFill>
+                  <a:schemeClr val="tx1"/>
+                </a:solidFill>
+                <a:effectLst/>
+                <a:latin typeface="Arial" panose="020B0604020202020204" pitchFamily="34" charset="0"/>
+              </a:rPr>
+              <a:t> Sch.</a:t>
+            </a:r>
+            <a:r>
+              <a:rPr kumimoji="0" lang="en-US" altLang="en-US" sz="1800" b="1" i="0" u="none" strike="noStrike" cap="none" normalizeH="0" baseline="0" dirty="0">
+                <a:ln>
+                  <a:noFill/>
+                </a:ln>
+                <a:solidFill>
+                  <a:schemeClr val="tx1"/>
+                </a:solidFill>
+                <a:effectLst/>
+                <a:latin typeface="Arial" panose="020B0604020202020204" pitchFamily="34" charset="0"/>
+              </a:rPr>
+              <a:t> 2024;2:qxae098. </a:t>
+            </a:r>
+          </a:p>
+          <a:p>
+            <a:pPr marL="342900" marR="0" lvl="0" indent="-342900" algn="l" defTabSz="914400" rtl="0" eaLnBrk="0" fontAlgn="base" latinLnBrk="0" hangingPunct="0">
+              <a:lnSpc>
+                <a:spcPct val="100000"/>
+              </a:lnSpc>
+              <a:spcBef>
+                <a:spcPct val="0"/>
+              </a:spcBef>
+              <a:spcAft>
+                <a:spcPct val="0"/>
+              </a:spcAft>
+              <a:buClrTx/>
+              <a:buSzTx/>
+              <a:buFont typeface="+mj-lt"/>
+              <a:buAutoNum type="arabicPeriod"/>
+              <a:tabLst/>
+            </a:pPr>
+            <a:r>
+              <a:rPr kumimoji="0" lang="en-US" altLang="en-US" sz="1800" b="1" i="0" u="none" strike="noStrike" cap="none" normalizeH="0" baseline="0" dirty="0" err="1">
+                <a:ln>
+                  <a:noFill/>
+                </a:ln>
+                <a:solidFill>
+                  <a:schemeClr val="tx1"/>
+                </a:solidFill>
+                <a:effectLst/>
+                <a:latin typeface="Arial" panose="020B0604020202020204" pitchFamily="34" charset="0"/>
+              </a:rPr>
+              <a:t>Frisse</a:t>
+            </a:r>
+            <a:r>
+              <a:rPr kumimoji="0" lang="en-US" altLang="en-US" sz="1800" b="1" i="0" u="none" strike="noStrike" cap="none" normalizeH="0" baseline="0" dirty="0">
+                <a:ln>
+                  <a:noFill/>
+                </a:ln>
+                <a:solidFill>
+                  <a:schemeClr val="tx1"/>
+                </a:solidFill>
+                <a:effectLst/>
+                <a:latin typeface="Arial" panose="020B0604020202020204" pitchFamily="34" charset="0"/>
+              </a:rPr>
+              <a:t> ME, et al. </a:t>
+            </a:r>
+            <a:r>
+              <a:rPr kumimoji="0" lang="en-US" altLang="en-US" sz="1800" b="1" i="1" u="none" strike="noStrike" cap="none" normalizeH="0" baseline="0" dirty="0">
+                <a:ln>
+                  <a:noFill/>
+                </a:ln>
+                <a:solidFill>
+                  <a:schemeClr val="tx1"/>
+                </a:solidFill>
+                <a:effectLst/>
+                <a:latin typeface="Arial" panose="020B0604020202020204" pitchFamily="34" charset="0"/>
+              </a:rPr>
+              <a:t>J Am Med Inform Assoc.</a:t>
+            </a:r>
+            <a:r>
+              <a:rPr kumimoji="0" lang="en-US" altLang="en-US" sz="1800" b="1" i="0" u="none" strike="noStrike" cap="none" normalizeH="0" baseline="0" dirty="0">
+                <a:ln>
+                  <a:noFill/>
+                </a:ln>
+                <a:solidFill>
+                  <a:schemeClr val="tx1"/>
+                </a:solidFill>
+                <a:effectLst/>
+                <a:latin typeface="Arial" panose="020B0604020202020204" pitchFamily="34" charset="0"/>
+              </a:rPr>
+              <a:t> 2012;19:328–333. </a:t>
+            </a:r>
+          </a:p>
+          <a:p>
+            <a:pPr marL="342900" marR="0" lvl="0" indent="-342900" algn="l" defTabSz="914400" rtl="0" eaLnBrk="0" fontAlgn="base" latinLnBrk="0" hangingPunct="0">
+              <a:lnSpc>
+                <a:spcPct val="100000"/>
+              </a:lnSpc>
+              <a:spcBef>
+                <a:spcPct val="0"/>
+              </a:spcBef>
+              <a:spcAft>
+                <a:spcPct val="0"/>
+              </a:spcAft>
+              <a:buClrTx/>
+              <a:buSzTx/>
+              <a:buFont typeface="+mj-lt"/>
+              <a:buAutoNum type="arabicPeriod"/>
+              <a:tabLst/>
+            </a:pPr>
+            <a:r>
+              <a:rPr kumimoji="0" lang="en-US" altLang="en-US" sz="1800" b="1" i="0" u="none" strike="noStrike" cap="none" normalizeH="0" baseline="0" dirty="0">
+                <a:ln>
+                  <a:noFill/>
+                </a:ln>
+                <a:solidFill>
+                  <a:schemeClr val="tx1"/>
+                </a:solidFill>
+                <a:effectLst/>
+                <a:latin typeface="Arial" panose="020B0604020202020204" pitchFamily="34" charset="0"/>
+              </a:rPr>
+              <a:t>Hersh WR, et al. </a:t>
+            </a:r>
+            <a:r>
+              <a:rPr kumimoji="0" lang="en-US" altLang="en-US" sz="1800" b="1" i="1" u="none" strike="noStrike" cap="none" normalizeH="0" baseline="0" dirty="0">
+                <a:ln>
+                  <a:noFill/>
+                </a:ln>
+                <a:solidFill>
+                  <a:schemeClr val="tx1"/>
+                </a:solidFill>
+                <a:effectLst/>
+                <a:latin typeface="Arial" panose="020B0604020202020204" pitchFamily="34" charset="0"/>
+              </a:rPr>
+              <a:t>JMIR Med Inform.</a:t>
+            </a:r>
+            <a:r>
+              <a:rPr kumimoji="0" lang="en-US" altLang="en-US" sz="1800" b="1" i="0" u="none" strike="noStrike" cap="none" normalizeH="0" baseline="0" dirty="0">
+                <a:ln>
+                  <a:noFill/>
+                </a:ln>
+                <a:solidFill>
+                  <a:schemeClr val="tx1"/>
+                </a:solidFill>
+                <a:effectLst/>
+                <a:latin typeface="Arial" panose="020B0604020202020204" pitchFamily="34" charset="0"/>
+              </a:rPr>
+              <a:t> 2015;3:e39. </a:t>
+            </a:r>
+          </a:p>
+          <a:p>
+            <a:pPr marL="342900" marR="0" lvl="0" indent="-342900" algn="l" defTabSz="914400" rtl="0" eaLnBrk="0" fontAlgn="base" latinLnBrk="0" hangingPunct="0">
+              <a:lnSpc>
+                <a:spcPct val="100000"/>
+              </a:lnSpc>
+              <a:spcBef>
+                <a:spcPct val="0"/>
+              </a:spcBef>
+              <a:spcAft>
+                <a:spcPct val="0"/>
+              </a:spcAft>
+              <a:buClrTx/>
+              <a:buSzTx/>
+              <a:buFont typeface="+mj-lt"/>
+              <a:buAutoNum type="arabicPeriod"/>
+              <a:tabLst/>
+            </a:pPr>
+            <a:r>
+              <a:rPr kumimoji="0" lang="en-US" altLang="en-US" sz="1800" b="1" i="0" u="none" strike="noStrike" cap="none" normalizeH="0" baseline="0" dirty="0">
+                <a:ln>
+                  <a:noFill/>
+                </a:ln>
+                <a:solidFill>
+                  <a:schemeClr val="tx1"/>
+                </a:solidFill>
+                <a:effectLst/>
+                <a:latin typeface="Arial" panose="020B0604020202020204" pitchFamily="34" charset="0"/>
+              </a:rPr>
+              <a:t>Hincapie A, </a:t>
+            </a:r>
+            <a:r>
+              <a:rPr kumimoji="0" lang="en-US" altLang="en-US" sz="1800" b="1" i="0" u="none" strike="noStrike" cap="none" normalizeH="0" baseline="0" dirty="0" err="1">
+                <a:ln>
+                  <a:noFill/>
+                </a:ln>
+                <a:solidFill>
+                  <a:schemeClr val="tx1"/>
+                </a:solidFill>
+                <a:effectLst/>
+                <a:latin typeface="Arial" panose="020B0604020202020204" pitchFamily="34" charset="0"/>
+              </a:rPr>
+              <a:t>Warholak</a:t>
+            </a:r>
+            <a:r>
+              <a:rPr kumimoji="0" lang="en-US" altLang="en-US" sz="1800" b="1" i="0" u="none" strike="noStrike" cap="none" normalizeH="0" baseline="0" dirty="0">
+                <a:ln>
+                  <a:noFill/>
+                </a:ln>
+                <a:solidFill>
+                  <a:schemeClr val="tx1"/>
+                </a:solidFill>
+                <a:effectLst/>
+                <a:latin typeface="Arial" panose="020B0604020202020204" pitchFamily="34" charset="0"/>
+              </a:rPr>
+              <a:t> T. </a:t>
+            </a:r>
+            <a:r>
+              <a:rPr kumimoji="0" lang="en-US" altLang="en-US" sz="1800" b="1" i="1" u="none" strike="noStrike" cap="none" normalizeH="0" baseline="0" dirty="0">
+                <a:ln>
+                  <a:noFill/>
+                </a:ln>
+                <a:solidFill>
+                  <a:schemeClr val="tx1"/>
+                </a:solidFill>
+                <a:effectLst/>
+                <a:latin typeface="Arial" panose="020B0604020202020204" pitchFamily="34" charset="0"/>
+              </a:rPr>
+              <a:t>Appl Clin Inform.</a:t>
+            </a:r>
+            <a:r>
+              <a:rPr kumimoji="0" lang="en-US" altLang="en-US" sz="1800" b="1" i="0" u="none" strike="noStrike" cap="none" normalizeH="0" baseline="0" dirty="0">
+                <a:ln>
+                  <a:noFill/>
+                </a:ln>
+                <a:solidFill>
+                  <a:schemeClr val="tx1"/>
+                </a:solidFill>
+                <a:effectLst/>
+                <a:latin typeface="Arial" panose="020B0604020202020204" pitchFamily="34" charset="0"/>
+              </a:rPr>
+              <a:t> 2011;2:499–507. </a:t>
+            </a:r>
+          </a:p>
+          <a:p>
+            <a:pPr marL="342900" marR="0" lvl="0" indent="-342900" algn="l" defTabSz="914400" rtl="0" eaLnBrk="0" fontAlgn="base" latinLnBrk="0" hangingPunct="0">
+              <a:lnSpc>
+                <a:spcPct val="100000"/>
+              </a:lnSpc>
+              <a:spcBef>
+                <a:spcPct val="0"/>
+              </a:spcBef>
+              <a:spcAft>
+                <a:spcPct val="0"/>
+              </a:spcAft>
+              <a:buClrTx/>
+              <a:buSzTx/>
+              <a:buFont typeface="+mj-lt"/>
+              <a:buAutoNum type="arabicPeriod"/>
+              <a:tabLst/>
+            </a:pPr>
+            <a:r>
+              <a:rPr kumimoji="0" lang="en-US" altLang="en-US" sz="1800" b="1" i="0" u="none" strike="noStrike" cap="none" normalizeH="0" baseline="0" dirty="0" err="1">
+                <a:ln>
+                  <a:noFill/>
+                </a:ln>
+                <a:solidFill>
+                  <a:schemeClr val="tx1"/>
+                </a:solidFill>
+                <a:effectLst/>
+                <a:latin typeface="Arial" panose="020B0604020202020204" pitchFamily="34" charset="0"/>
+              </a:rPr>
+              <a:t>Janakiraman</a:t>
+            </a:r>
+            <a:r>
+              <a:rPr kumimoji="0" lang="en-US" altLang="en-US" sz="1800" b="1" i="0" u="none" strike="noStrike" cap="none" normalizeH="0" baseline="0" dirty="0">
+                <a:ln>
+                  <a:noFill/>
+                </a:ln>
+                <a:solidFill>
+                  <a:schemeClr val="tx1"/>
+                </a:solidFill>
+                <a:effectLst/>
+                <a:latin typeface="Arial" panose="020B0604020202020204" pitchFamily="34" charset="0"/>
+              </a:rPr>
+              <a:t> R, et al. </a:t>
+            </a:r>
+            <a:r>
+              <a:rPr kumimoji="0" lang="en-US" altLang="en-US" sz="1800" b="1" i="1" u="none" strike="noStrike" cap="none" normalizeH="0" baseline="0" dirty="0">
+                <a:ln>
+                  <a:noFill/>
+                </a:ln>
+                <a:solidFill>
+                  <a:schemeClr val="tx1"/>
+                </a:solidFill>
+                <a:effectLst/>
+                <a:latin typeface="Arial" panose="020B0604020202020204" pitchFamily="34" charset="0"/>
+              </a:rPr>
+              <a:t>Manage Sci.</a:t>
+            </a:r>
+            <a:r>
+              <a:rPr kumimoji="0" lang="en-US" altLang="en-US" sz="1800" b="1" i="0" u="none" strike="noStrike" cap="none" normalizeH="0" baseline="0" dirty="0">
+                <a:ln>
+                  <a:noFill/>
+                </a:ln>
+                <a:solidFill>
+                  <a:schemeClr val="tx1"/>
+                </a:solidFill>
+                <a:effectLst/>
+                <a:latin typeface="Arial" panose="020B0604020202020204" pitchFamily="34" charset="0"/>
+              </a:rPr>
+              <a:t> 2022;69:791–811. </a:t>
+            </a:r>
+          </a:p>
+          <a:p>
+            <a:pPr marL="342900" marR="0" lvl="0" indent="-342900" algn="l" defTabSz="914400" rtl="0" eaLnBrk="0" fontAlgn="base" latinLnBrk="0" hangingPunct="0">
+              <a:lnSpc>
+                <a:spcPct val="100000"/>
+              </a:lnSpc>
+              <a:spcBef>
+                <a:spcPct val="0"/>
+              </a:spcBef>
+              <a:spcAft>
+                <a:spcPct val="0"/>
+              </a:spcAft>
+              <a:buClrTx/>
+              <a:buSzTx/>
+              <a:buFont typeface="+mj-lt"/>
+              <a:buAutoNum type="arabicPeriod"/>
+              <a:tabLst/>
+            </a:pPr>
+            <a:r>
+              <a:rPr kumimoji="0" lang="en-US" altLang="en-US" sz="1800" b="1" i="0" u="none" strike="noStrike" cap="none" normalizeH="0" baseline="0" dirty="0">
+                <a:ln>
+                  <a:noFill/>
+                </a:ln>
+                <a:solidFill>
+                  <a:schemeClr val="tx1"/>
+                </a:solidFill>
+                <a:effectLst/>
+                <a:latin typeface="Arial" panose="020B0604020202020204" pitchFamily="34" charset="0"/>
+              </a:rPr>
+              <a:t>Kim HJ, Choi S. </a:t>
+            </a:r>
+            <a:r>
+              <a:rPr kumimoji="0" lang="en-US" altLang="en-US" sz="1800" b="1" i="1" u="none" strike="noStrike" cap="none" normalizeH="0" baseline="0" dirty="0">
+                <a:ln>
+                  <a:noFill/>
+                </a:ln>
+                <a:solidFill>
+                  <a:schemeClr val="tx1"/>
+                </a:solidFill>
+                <a:effectLst/>
+                <a:latin typeface="Arial" panose="020B0604020202020204" pitchFamily="34" charset="0"/>
+              </a:rPr>
+              <a:t>J Korean </a:t>
+            </a:r>
+            <a:r>
+              <a:rPr kumimoji="0" lang="en-US" altLang="en-US" sz="1800" b="1" i="1" u="none" strike="noStrike" cap="none" normalizeH="0" baseline="0" dirty="0" err="1">
+                <a:ln>
+                  <a:noFill/>
+                </a:ln>
+                <a:solidFill>
+                  <a:schemeClr val="tx1"/>
+                </a:solidFill>
+                <a:effectLst/>
+                <a:latin typeface="Arial" panose="020B0604020202020204" pitchFamily="34" charset="0"/>
+              </a:rPr>
+              <a:t>Acad</a:t>
+            </a:r>
+            <a:r>
+              <a:rPr kumimoji="0" lang="en-US" altLang="en-US" sz="1800" b="1" i="1" u="none" strike="noStrike" cap="none" normalizeH="0" baseline="0" dirty="0">
+                <a:ln>
+                  <a:noFill/>
+                </a:ln>
+                <a:solidFill>
+                  <a:schemeClr val="tx1"/>
+                </a:solidFill>
+                <a:effectLst/>
+                <a:latin typeface="Arial" panose="020B0604020202020204" pitchFamily="34" charset="0"/>
+              </a:rPr>
+              <a:t> </a:t>
+            </a:r>
+            <a:r>
+              <a:rPr kumimoji="0" lang="en-US" altLang="en-US" sz="1800" b="1" i="1" u="none" strike="noStrike" cap="none" normalizeH="0" baseline="0" dirty="0" err="1">
+                <a:ln>
+                  <a:noFill/>
+                </a:ln>
+                <a:solidFill>
+                  <a:schemeClr val="tx1"/>
+                </a:solidFill>
+                <a:effectLst/>
+                <a:latin typeface="Arial" panose="020B0604020202020204" pitchFamily="34" charset="0"/>
+              </a:rPr>
+              <a:t>Fundam</a:t>
+            </a:r>
+            <a:r>
+              <a:rPr kumimoji="0" lang="en-US" altLang="en-US" sz="1800" b="1" i="1" u="none" strike="noStrike" cap="none" normalizeH="0" baseline="0" dirty="0">
+                <a:ln>
+                  <a:noFill/>
+                </a:ln>
+                <a:solidFill>
+                  <a:schemeClr val="tx1"/>
+                </a:solidFill>
+                <a:effectLst/>
+                <a:latin typeface="Arial" panose="020B0604020202020204" pitchFamily="34" charset="0"/>
+              </a:rPr>
+              <a:t> </a:t>
+            </a:r>
+            <a:r>
+              <a:rPr kumimoji="0" lang="en-US" altLang="en-US" sz="1800" b="1" i="1" u="none" strike="noStrike" cap="none" normalizeH="0" baseline="0" dirty="0" err="1">
+                <a:ln>
+                  <a:noFill/>
+                </a:ln>
+                <a:solidFill>
+                  <a:schemeClr val="tx1"/>
+                </a:solidFill>
+                <a:effectLst/>
+                <a:latin typeface="Arial" panose="020B0604020202020204" pitchFamily="34" charset="0"/>
+              </a:rPr>
+              <a:t>Nurs</a:t>
+            </a:r>
+            <a:r>
+              <a:rPr kumimoji="0" lang="en-US" altLang="en-US" sz="1800" b="1" i="1" u="none" strike="noStrike" cap="none" normalizeH="0" baseline="0" dirty="0">
+                <a:ln>
+                  <a:noFill/>
+                </a:ln>
+                <a:solidFill>
+                  <a:schemeClr val="tx1"/>
+                </a:solidFill>
+                <a:effectLst/>
+                <a:latin typeface="Arial" panose="020B0604020202020204" pitchFamily="34" charset="0"/>
+              </a:rPr>
+              <a:t>.</a:t>
+            </a:r>
+            <a:r>
+              <a:rPr kumimoji="0" lang="en-US" altLang="en-US" sz="1800" b="1" i="0" u="none" strike="noStrike" cap="none" normalizeH="0" baseline="0" dirty="0">
+                <a:ln>
+                  <a:noFill/>
+                </a:ln>
+                <a:solidFill>
+                  <a:schemeClr val="tx1"/>
+                </a:solidFill>
+                <a:effectLst/>
+                <a:latin typeface="Arial" panose="020B0604020202020204" pitchFamily="34" charset="0"/>
+              </a:rPr>
+              <a:t> 2025;32:243–252. </a:t>
+            </a:r>
+          </a:p>
+          <a:p>
+            <a:pPr marL="342900" marR="0" lvl="0" indent="-342900" algn="l" defTabSz="914400" rtl="0" eaLnBrk="0" fontAlgn="base" latinLnBrk="0" hangingPunct="0">
+              <a:lnSpc>
+                <a:spcPct val="100000"/>
+              </a:lnSpc>
+              <a:spcBef>
+                <a:spcPct val="0"/>
+              </a:spcBef>
+              <a:spcAft>
+                <a:spcPct val="0"/>
+              </a:spcAft>
+              <a:buClrTx/>
+              <a:buSzTx/>
+              <a:buFont typeface="+mj-lt"/>
+              <a:buAutoNum type="arabicPeriod"/>
+              <a:tabLst/>
+            </a:pPr>
+            <a:r>
+              <a:rPr kumimoji="0" lang="en-US" altLang="en-US" sz="1800" b="1" i="0" u="none" strike="noStrike" cap="none" normalizeH="0" baseline="0" dirty="0" err="1">
+                <a:ln>
+                  <a:noFill/>
+                </a:ln>
+                <a:solidFill>
+                  <a:schemeClr val="tx1"/>
+                </a:solidFill>
+                <a:effectLst/>
+                <a:latin typeface="Arial" panose="020B0604020202020204" pitchFamily="34" charset="0"/>
+              </a:rPr>
+              <a:t>Menachemi</a:t>
+            </a:r>
+            <a:r>
+              <a:rPr kumimoji="0" lang="en-US" altLang="en-US" sz="1800" b="1" i="0" u="none" strike="noStrike" cap="none" normalizeH="0" baseline="0" dirty="0">
+                <a:ln>
+                  <a:noFill/>
+                </a:ln>
+                <a:solidFill>
+                  <a:schemeClr val="tx1"/>
+                </a:solidFill>
+                <a:effectLst/>
+                <a:latin typeface="Arial" panose="020B0604020202020204" pitchFamily="34" charset="0"/>
+              </a:rPr>
+              <a:t> N, et al. </a:t>
+            </a:r>
+            <a:r>
+              <a:rPr kumimoji="0" lang="en-US" altLang="en-US" sz="1800" b="1" i="1" u="none" strike="noStrike" cap="none" normalizeH="0" baseline="0" dirty="0">
+                <a:ln>
+                  <a:noFill/>
+                </a:ln>
+                <a:solidFill>
+                  <a:schemeClr val="tx1"/>
+                </a:solidFill>
+                <a:effectLst/>
+                <a:latin typeface="Arial" panose="020B0604020202020204" pitchFamily="34" charset="0"/>
+              </a:rPr>
+              <a:t>J Am Med Inform Assoc.</a:t>
+            </a:r>
+            <a:r>
+              <a:rPr kumimoji="0" lang="en-US" altLang="en-US" sz="1800" b="1" i="0" u="none" strike="noStrike" cap="none" normalizeH="0" baseline="0" dirty="0">
+                <a:ln>
+                  <a:noFill/>
+                </a:ln>
+                <a:solidFill>
+                  <a:schemeClr val="tx1"/>
+                </a:solidFill>
+                <a:effectLst/>
+                <a:latin typeface="Arial" panose="020B0604020202020204" pitchFamily="34" charset="0"/>
+              </a:rPr>
+              <a:t> 2018;25:1259–1265. </a:t>
+            </a:r>
+          </a:p>
+          <a:p>
+            <a:pPr marL="342900" marR="0" lvl="0" indent="-342900" algn="l" defTabSz="914400" rtl="0" eaLnBrk="0" fontAlgn="base" latinLnBrk="0" hangingPunct="0">
+              <a:lnSpc>
+                <a:spcPct val="100000"/>
+              </a:lnSpc>
+              <a:spcBef>
+                <a:spcPct val="0"/>
+              </a:spcBef>
+              <a:spcAft>
+                <a:spcPct val="0"/>
+              </a:spcAft>
+              <a:buClrTx/>
+              <a:buSzTx/>
+              <a:buFont typeface="+mj-lt"/>
+              <a:buAutoNum type="arabicPeriod"/>
+              <a:tabLst/>
+            </a:pPr>
+            <a:r>
+              <a:rPr kumimoji="0" lang="en-US" altLang="en-US" sz="1800" b="1" i="0" u="none" strike="noStrike" cap="none" normalizeH="0" baseline="0" dirty="0" err="1">
+                <a:ln>
+                  <a:noFill/>
+                </a:ln>
+                <a:solidFill>
+                  <a:schemeClr val="tx1"/>
+                </a:solidFill>
+                <a:effectLst/>
+                <a:latin typeface="Arial" panose="020B0604020202020204" pitchFamily="34" charset="0"/>
+              </a:rPr>
+              <a:t>Sadoughi</a:t>
+            </a:r>
+            <a:r>
+              <a:rPr kumimoji="0" lang="en-US" altLang="en-US" sz="1800" b="1" i="0" u="none" strike="noStrike" cap="none" normalizeH="0" baseline="0" dirty="0">
+                <a:ln>
+                  <a:noFill/>
+                </a:ln>
+                <a:solidFill>
+                  <a:schemeClr val="tx1"/>
+                </a:solidFill>
+                <a:effectLst/>
+                <a:latin typeface="Arial" panose="020B0604020202020204" pitchFamily="34" charset="0"/>
+              </a:rPr>
+              <a:t> F, et al. </a:t>
+            </a:r>
+            <a:r>
+              <a:rPr kumimoji="0" lang="en-US" altLang="en-US" sz="1800" b="1" i="1" u="none" strike="noStrike" cap="none" normalizeH="0" baseline="0" dirty="0" err="1">
+                <a:ln>
+                  <a:noFill/>
+                </a:ln>
+                <a:solidFill>
+                  <a:schemeClr val="tx1"/>
+                </a:solidFill>
+                <a:effectLst/>
+                <a:latin typeface="Arial" panose="020B0604020202020204" pitchFamily="34" charset="0"/>
+              </a:rPr>
+              <a:t>Comput</a:t>
+            </a:r>
+            <a:r>
+              <a:rPr kumimoji="0" lang="en-US" altLang="en-US" sz="1800" b="1" i="1" u="none" strike="noStrike" cap="none" normalizeH="0" baseline="0" dirty="0">
+                <a:ln>
+                  <a:noFill/>
+                </a:ln>
+                <a:solidFill>
+                  <a:schemeClr val="tx1"/>
+                </a:solidFill>
+                <a:effectLst/>
+                <a:latin typeface="Arial" panose="020B0604020202020204" pitchFamily="34" charset="0"/>
+              </a:rPr>
+              <a:t> Methods Programs Biomed.</a:t>
+            </a:r>
+            <a:r>
+              <a:rPr kumimoji="0" lang="en-US" altLang="en-US" sz="1800" b="1" i="0" u="none" strike="noStrike" cap="none" normalizeH="0" baseline="0" dirty="0">
+                <a:ln>
+                  <a:noFill/>
+                </a:ln>
+                <a:solidFill>
+                  <a:schemeClr val="tx1"/>
+                </a:solidFill>
+                <a:effectLst/>
+                <a:latin typeface="Arial" panose="020B0604020202020204" pitchFamily="34" charset="0"/>
+              </a:rPr>
+              <a:t> 2018;161:209–232. </a:t>
+            </a:r>
+          </a:p>
+          <a:p>
+            <a:pPr marL="342900" marR="0" lvl="0" indent="-342900" algn="l" defTabSz="914400" rtl="0" eaLnBrk="0" fontAlgn="base" latinLnBrk="0" hangingPunct="0">
+              <a:lnSpc>
+                <a:spcPct val="100000"/>
+              </a:lnSpc>
+              <a:spcBef>
+                <a:spcPct val="0"/>
+              </a:spcBef>
+              <a:spcAft>
+                <a:spcPct val="0"/>
+              </a:spcAft>
+              <a:buClrTx/>
+              <a:buSzTx/>
+              <a:buFont typeface="+mj-lt"/>
+              <a:buAutoNum type="arabicPeriod"/>
+              <a:tabLst/>
+            </a:pPr>
+            <a:r>
+              <a:rPr kumimoji="0" lang="en-US" altLang="en-US" sz="1800" b="1" i="0" u="none" strike="noStrike" cap="none" normalizeH="0" baseline="0" dirty="0" err="1">
+                <a:ln>
+                  <a:noFill/>
+                </a:ln>
+                <a:solidFill>
+                  <a:schemeClr val="tx1"/>
+                </a:solidFill>
+                <a:effectLst/>
+                <a:latin typeface="Arial" panose="020B0604020202020204" pitchFamily="34" charset="0"/>
+              </a:rPr>
+              <a:t>Turbow</a:t>
+            </a:r>
+            <a:r>
+              <a:rPr kumimoji="0" lang="en-US" altLang="en-US" sz="1800" b="1" i="0" u="none" strike="noStrike" cap="none" normalizeH="0" baseline="0" dirty="0">
+                <a:ln>
+                  <a:noFill/>
+                </a:ln>
+                <a:solidFill>
+                  <a:schemeClr val="tx1"/>
+                </a:solidFill>
+                <a:effectLst/>
+                <a:latin typeface="Arial" panose="020B0604020202020204" pitchFamily="34" charset="0"/>
+              </a:rPr>
+              <a:t> S, et al. </a:t>
+            </a:r>
+            <a:r>
+              <a:rPr kumimoji="0" lang="en-US" altLang="en-US" sz="1800" b="1" i="1" u="none" strike="noStrike" cap="none" normalizeH="0" baseline="0" dirty="0">
+                <a:ln>
+                  <a:noFill/>
+                </a:ln>
+                <a:solidFill>
+                  <a:schemeClr val="tx1"/>
+                </a:solidFill>
+                <a:effectLst/>
+                <a:latin typeface="Arial" panose="020B0604020202020204" pitchFamily="34" charset="0"/>
+              </a:rPr>
+              <a:t>JMIR Aging.</a:t>
+            </a:r>
+            <a:r>
+              <a:rPr kumimoji="0" lang="en-US" altLang="en-US" sz="1800" b="1" i="0" u="none" strike="noStrike" cap="none" normalizeH="0" baseline="0" dirty="0">
+                <a:ln>
+                  <a:noFill/>
+                </a:ln>
+                <a:solidFill>
+                  <a:schemeClr val="tx1"/>
+                </a:solidFill>
+                <a:effectLst/>
+                <a:latin typeface="Arial" panose="020B0604020202020204" pitchFamily="34" charset="0"/>
+              </a:rPr>
+              <a:t> 2023;6:e41936. </a:t>
+            </a:r>
+          </a:p>
+          <a:p>
+            <a:pPr marL="342900" marR="0" lvl="0" indent="-342900" algn="l" defTabSz="914400" rtl="0" eaLnBrk="0" fontAlgn="base" latinLnBrk="0" hangingPunct="0">
+              <a:lnSpc>
+                <a:spcPct val="100000"/>
+              </a:lnSpc>
+              <a:spcBef>
+                <a:spcPct val="0"/>
+              </a:spcBef>
+              <a:spcAft>
+                <a:spcPct val="0"/>
+              </a:spcAft>
+              <a:buClrTx/>
+              <a:buSzTx/>
+              <a:buFont typeface="+mj-lt"/>
+              <a:buAutoNum type="arabicPeriod"/>
+              <a:tabLst/>
+            </a:pPr>
+            <a:r>
+              <a:rPr kumimoji="0" lang="en-US" altLang="en-US" sz="1800" b="1" i="0" u="none" strike="noStrike" cap="none" normalizeH="0" baseline="0" dirty="0">
+                <a:ln>
+                  <a:noFill/>
+                </a:ln>
+                <a:solidFill>
+                  <a:schemeClr val="tx1"/>
+                </a:solidFill>
+                <a:effectLst/>
+                <a:latin typeface="Arial" panose="020B0604020202020204" pitchFamily="34" charset="0"/>
+              </a:rPr>
+              <a:t>ONC. </a:t>
+            </a:r>
+            <a:r>
+              <a:rPr kumimoji="0" lang="en-US" altLang="en-US" sz="1800" b="1" i="1" u="none" strike="noStrike" cap="none" normalizeH="0" baseline="0" dirty="0">
+                <a:ln>
+                  <a:noFill/>
+                </a:ln>
+                <a:solidFill>
+                  <a:schemeClr val="tx1"/>
+                </a:solidFill>
+                <a:effectLst/>
+                <a:latin typeface="Arial" panose="020B0604020202020204" pitchFamily="34" charset="0"/>
+              </a:rPr>
+              <a:t>US Hospital Participation in Health Information Networks</a:t>
+            </a:r>
+            <a:r>
+              <a:rPr kumimoji="0" lang="en-US" altLang="en-US" sz="1800" b="1" i="0" u="none" strike="noStrike" cap="none" normalizeH="0" baseline="0" dirty="0">
+                <a:ln>
+                  <a:noFill/>
+                </a:ln>
+                <a:solidFill>
+                  <a:schemeClr val="tx1"/>
+                </a:solidFill>
+                <a:effectLst/>
+                <a:latin typeface="Arial" panose="020B0604020202020204" pitchFamily="34" charset="0"/>
+              </a:rPr>
+              <a:t> [data set]. 2026. </a:t>
+            </a:r>
+          </a:p>
+          <a:p>
+            <a:pPr marL="342900" marR="0" lvl="0" indent="-342900" algn="l" defTabSz="914400" rtl="0" eaLnBrk="0" fontAlgn="base" latinLnBrk="0" hangingPunct="0">
+              <a:lnSpc>
+                <a:spcPct val="100000"/>
+              </a:lnSpc>
+              <a:spcBef>
+                <a:spcPct val="0"/>
+              </a:spcBef>
+              <a:spcAft>
+                <a:spcPct val="0"/>
+              </a:spcAft>
+              <a:buClrTx/>
+              <a:buSzTx/>
+              <a:buFont typeface="+mj-lt"/>
+              <a:buAutoNum type="arabicPeriod"/>
+              <a:tabLst/>
+            </a:pPr>
+            <a:r>
+              <a:rPr kumimoji="0" lang="en-US" altLang="en-US" sz="1800" b="1" i="0" u="none" strike="noStrike" cap="none" normalizeH="0" baseline="0" dirty="0">
+                <a:ln>
+                  <a:noFill/>
+                </a:ln>
+                <a:solidFill>
+                  <a:schemeClr val="tx1"/>
+                </a:solidFill>
+                <a:effectLst/>
+                <a:latin typeface="Arial" panose="020B0604020202020204" pitchFamily="34" charset="0"/>
+              </a:rPr>
+              <a:t>CMS. </a:t>
+            </a:r>
+            <a:r>
+              <a:rPr kumimoji="0" lang="en-US" altLang="en-US" sz="1800" b="1" i="1" u="none" strike="noStrike" cap="none" normalizeH="0" baseline="0" dirty="0">
+                <a:ln>
+                  <a:noFill/>
+                </a:ln>
+                <a:solidFill>
+                  <a:schemeClr val="tx1"/>
+                </a:solidFill>
+                <a:effectLst/>
+                <a:latin typeface="Arial" panose="020B0604020202020204" pitchFamily="34" charset="0"/>
+              </a:rPr>
+              <a:t>Complications and Deaths—Hospital</a:t>
+            </a:r>
+            <a:r>
+              <a:rPr kumimoji="0" lang="en-US" altLang="en-US" sz="1800" b="1" i="0" u="none" strike="noStrike" cap="none" normalizeH="0" baseline="0" dirty="0">
+                <a:ln>
+                  <a:noFill/>
+                </a:ln>
+                <a:solidFill>
+                  <a:schemeClr val="tx1"/>
+                </a:solidFill>
+                <a:effectLst/>
+                <a:latin typeface="Arial" panose="020B0604020202020204" pitchFamily="34" charset="0"/>
+              </a:rPr>
+              <a:t> [data set]. 2026. </a:t>
+            </a:r>
+          </a:p>
+        </p:txBody>
+      </p:sp>
     </p:spTree>
   </p:cSld>
   <p:clrMapOvr>

--- a/poster/BMI6313_TEFCA_Poster_Jordan_Pulaski.pptx
+++ b/poster/BMI6313_TEFCA_Poster_Jordan_Pulaski.pptx
@@ -236,12 +236,12 @@
   <pc:docChgLst>
     <pc:chgData name="Pulaski, Jordan A" userId="b59e5678-eb70-4bba-8605-0c3b286199fc" providerId="ADAL" clId="{ECF8852F-3FCF-4736-A5DC-07A8B6B99125}"/>
     <pc:docChg chg="undo redo custSel modSld">
-      <pc:chgData name="Pulaski, Jordan A" userId="b59e5678-eb70-4bba-8605-0c3b286199fc" providerId="ADAL" clId="{ECF8852F-3FCF-4736-A5DC-07A8B6B99125}" dt="2026-07-27T21:18:49.644" v="400" actId="20577"/>
+      <pc:chgData name="Pulaski, Jordan A" userId="b59e5678-eb70-4bba-8605-0c3b286199fc" providerId="ADAL" clId="{ECF8852F-3FCF-4736-A5DC-07A8B6B99125}" dt="2026-07-27T21:49:38.674" v="414" actId="1076"/>
       <pc:docMkLst>
         <pc:docMk/>
       </pc:docMkLst>
       <pc:sldChg chg="addSp delSp modSp mod">
-        <pc:chgData name="Pulaski, Jordan A" userId="b59e5678-eb70-4bba-8605-0c3b286199fc" providerId="ADAL" clId="{ECF8852F-3FCF-4736-A5DC-07A8B6B99125}" dt="2026-07-27T21:18:49.644" v="400" actId="20577"/>
+        <pc:chgData name="Pulaski, Jordan A" userId="b59e5678-eb70-4bba-8605-0c3b286199fc" providerId="ADAL" clId="{ECF8852F-3FCF-4736-A5DC-07A8B6B99125}" dt="2026-07-27T21:49:38.674" v="414" actId="1076"/>
         <pc:sldMkLst>
           <pc:docMk/>
           <pc:sldMk cId="0" sldId="256"/>
@@ -335,6 +335,38 @@
           </ac:spMkLst>
         </pc:spChg>
         <pc:spChg chg="mod">
+          <ac:chgData name="Pulaski, Jordan A" userId="b59e5678-eb70-4bba-8605-0c3b286199fc" providerId="ADAL" clId="{ECF8852F-3FCF-4736-A5DC-07A8B6B99125}" dt="2026-07-27T21:49:09.608" v="408" actId="1076"/>
+          <ac:spMkLst>
+            <pc:docMk/>
+            <pc:sldMk cId="0" sldId="256"/>
+            <ac:spMk id="41" creationId="{AA430F72-F0A3-C4C6-3143-C7E47E5CC028}"/>
+          </ac:spMkLst>
+        </pc:spChg>
+        <pc:spChg chg="mod">
+          <ac:chgData name="Pulaski, Jordan A" userId="b59e5678-eb70-4bba-8605-0c3b286199fc" providerId="ADAL" clId="{ECF8852F-3FCF-4736-A5DC-07A8B6B99125}" dt="2026-07-27T21:49:21.587" v="410" actId="1076"/>
+          <ac:spMkLst>
+            <pc:docMk/>
+            <pc:sldMk cId="0" sldId="256"/>
+            <ac:spMk id="49" creationId="{92DA4AB8-32F5-8A8D-59CF-B9D79A7BC59B}"/>
+          </ac:spMkLst>
+        </pc:spChg>
+        <pc:spChg chg="mod">
+          <ac:chgData name="Pulaski, Jordan A" userId="b59e5678-eb70-4bba-8605-0c3b286199fc" providerId="ADAL" clId="{ECF8852F-3FCF-4736-A5DC-07A8B6B99125}" dt="2026-07-27T21:49:38.674" v="414" actId="1076"/>
+          <ac:spMkLst>
+            <pc:docMk/>
+            <pc:sldMk cId="0" sldId="256"/>
+            <ac:spMk id="50" creationId="{1D544CF1-B90D-8C60-D389-B72F777172D5}"/>
+          </ac:spMkLst>
+        </pc:spChg>
+        <pc:spChg chg="mod">
+          <ac:chgData name="Pulaski, Jordan A" userId="b59e5678-eb70-4bba-8605-0c3b286199fc" providerId="ADAL" clId="{ECF8852F-3FCF-4736-A5DC-07A8B6B99125}" dt="2026-07-27T21:49:01.495" v="407" actId="14100"/>
+          <ac:spMkLst>
+            <pc:docMk/>
+            <pc:sldMk cId="0" sldId="256"/>
+            <ac:spMk id="53" creationId="{52E971C5-2597-B2AA-3A23-EAE3947F795E}"/>
+          </ac:spMkLst>
+        </pc:spChg>
+        <pc:spChg chg="mod">
           <ac:chgData name="Pulaski, Jordan A" userId="b59e5678-eb70-4bba-8605-0c3b286199fc" providerId="ADAL" clId="{ECF8852F-3FCF-4736-A5DC-07A8B6B99125}" dt="2026-07-27T20:40:52.590" v="159" actId="255"/>
           <ac:spMkLst>
             <pc:docMk/>
@@ -367,7 +399,7 @@
           </ac:spMkLst>
         </pc:spChg>
         <pc:spChg chg="mod">
-          <ac:chgData name="Pulaski, Jordan A" userId="b59e5678-eb70-4bba-8605-0c3b286199fc" providerId="ADAL" clId="{ECF8852F-3FCF-4736-A5DC-07A8B6B99125}" dt="2026-07-27T20:36:40.596" v="148" actId="14100"/>
+          <ac:chgData name="Pulaski, Jordan A" userId="b59e5678-eb70-4bba-8605-0c3b286199fc" providerId="ADAL" clId="{ECF8852F-3FCF-4736-A5DC-07A8B6B99125}" dt="2026-07-27T21:49:31.492" v="413" actId="1076"/>
           <ac:spMkLst>
             <pc:docMk/>
             <pc:sldMk cId="0" sldId="256"/>
@@ -438,6 +470,22 @@
             <ac:picMk id="1064" creationId="{5D15A370-C4E4-A783-B6E2-F2E3FA2DD4C1}"/>
           </ac:picMkLst>
         </pc:picChg>
+        <pc:cxnChg chg="mod">
+          <ac:chgData name="Pulaski, Jordan A" userId="b59e5678-eb70-4bba-8605-0c3b286199fc" providerId="ADAL" clId="{ECF8852F-3FCF-4736-A5DC-07A8B6B99125}" dt="2026-07-27T21:49:12.774" v="409" actId="1076"/>
+          <ac:cxnSpMkLst>
+            <pc:docMk/>
+            <pc:sldMk cId="0" sldId="256"/>
+            <ac:cxnSpMk id="43" creationId="{05BDB7AD-1FB8-6389-E3C0-6AE43F16E298}"/>
+          </ac:cxnSpMkLst>
+        </pc:cxnChg>
+        <pc:cxnChg chg="mod">
+          <ac:chgData name="Pulaski, Jordan A" userId="b59e5678-eb70-4bba-8605-0c3b286199fc" providerId="ADAL" clId="{ECF8852F-3FCF-4736-A5DC-07A8B6B99125}" dt="2026-07-27T21:49:27.345" v="411" actId="1076"/>
+          <ac:cxnSpMkLst>
+            <pc:docMk/>
+            <pc:sldMk cId="0" sldId="256"/>
+            <ac:cxnSpMk id="51" creationId="{B9FF13B0-C6A4-C88B-D80E-C659E1674CD3}"/>
+          </ac:cxnSpMkLst>
+        </pc:cxnChg>
       </pc:sldChg>
     </pc:docChg>
   </pc:docChgLst>
@@ -5056,35 +5104,21 @@
                 <a:latin typeface="Arial" pitchFamily="34" charset="0"/>
                 <a:cs typeface="Arial" pitchFamily="34" charset="0"/>
               </a:rPr>
-              <a:t> were linked to CMS Hybrid HWM data (7/1/2023–6/30/2024) and heart failure/pneumonia mortality data </a:t>
-            </a:r>
-            <a:r>
-              <a:rPr lang="en-US" sz="3400">
+              <a:t> were linked to CMS Hybrid HWM data (7/1/2023–6/30/2024) and heart failure/pneumonia mortality data (7/1/2021–6/30/2024).</a:t>
+            </a:r>
+            <a:r>
+              <a:rPr lang="en-US" sz="3400" baseline="30000" dirty="0">
                 <a:latin typeface="Arial" pitchFamily="34" charset="0"/>
                 <a:cs typeface="Arial" pitchFamily="34" charset="0"/>
               </a:rPr>
-              <a:t>(7/1/2021–6/30/2024).</a:t>
-            </a:r>
-            <a:r>
-              <a:rPr lang="en-US" sz="3400" baseline="30000">
-                <a:latin typeface="Arial" pitchFamily="34" charset="0"/>
-                <a:cs typeface="Arial" pitchFamily="34" charset="0"/>
-              </a:rPr>
               <a:t>13</a:t>
-            </a:r>
-            <a:r>
-              <a:rPr lang="en-US" sz="3400">
-                <a:latin typeface="Arial" pitchFamily="34" charset="0"/>
-                <a:cs typeface="Arial" pitchFamily="34" charset="0"/>
-              </a:rPr>
-              <a:t> </a:t>
             </a:r>
             <a:r>
               <a:rPr lang="en-US" sz="3400" dirty="0">
                 <a:latin typeface="Arial" pitchFamily="34" charset="0"/>
                 <a:cs typeface="Arial" pitchFamily="34" charset="0"/>
               </a:rPr>
-              <a:t>Adjusted OLS models compared current and neither status with planned participation, controlling for national network, EHR vendor network, and HIO participation, log CMS denominator, state, and survey year</a:t>
+              <a:t> Adjusted OLS models compared current and neither status with planned participation, controlling for national network, EHR vendor network, and HIO participation, log CMS denominator, state, and survey year</a:t>
             </a:r>
           </a:p>
           <a:p>
@@ -6400,7 +6434,7 @@
         </p:nvSpPr>
         <p:spPr bwMode="auto">
           <a:xfrm>
-            <a:off x="3200400" y="13290842"/>
+            <a:off x="3230227" y="13391867"/>
             <a:ext cx="1589352" cy="623678"/>
           </a:xfrm>
           <a:prstGeom prst="rect">
@@ -6476,7 +6510,7 @@
         </p:nvCxnSpPr>
         <p:spPr bwMode="auto">
           <a:xfrm>
-            <a:off x="5125280" y="13602681"/>
+            <a:off x="5146021" y="13700864"/>
             <a:ext cx="685800" cy="0"/>
           </a:xfrm>
           <a:prstGeom prst="straightConnector1">
@@ -6516,7 +6550,7 @@
         </p:nvSpPr>
         <p:spPr bwMode="auto">
           <a:xfrm>
-            <a:off x="6152933" y="13315017"/>
+            <a:off x="6043389" y="13405619"/>
             <a:ext cx="1717621" cy="623677"/>
           </a:xfrm>
           <a:prstGeom prst="rect">
@@ -6593,7 +6627,7 @@
         </p:nvSpPr>
         <p:spPr bwMode="auto">
           <a:xfrm>
-            <a:off x="9171834" y="13339809"/>
+            <a:off x="9110156" y="13381313"/>
             <a:ext cx="1717621" cy="600784"/>
           </a:xfrm>
           <a:prstGeom prst="rect">
@@ -6669,7 +6703,7 @@
         </p:nvCxnSpPr>
         <p:spPr bwMode="auto">
           <a:xfrm>
-            <a:off x="8097080" y="13602681"/>
+            <a:off x="8092155" y="13705738"/>
             <a:ext cx="801011" cy="0"/>
           </a:xfrm>
           <a:prstGeom prst="straightConnector1">
@@ -6709,14 +6743,14 @@
         </p:nvSpPr>
         <p:spPr>
           <a:xfrm>
-            <a:off x="429768" y="14141449"/>
-            <a:ext cx="13222224" cy="584775"/>
+            <a:off x="329374" y="14195989"/>
+            <a:ext cx="13322618" cy="584775"/>
           </a:xfrm>
           <a:prstGeom prst="rect">
             <a:avLst/>
           </a:prstGeom>
           <a:solidFill>
-            <a:srgbClr val="E7F4F5"/>
+            <a:srgbClr val="FFFFCC"/>
           </a:solidFill>
         </p:spPr>
         <p:txBody>

--- a/poster/BMI6313_TEFCA_Poster_Jordan_Pulaski.pptx
+++ b/poster/BMI6313_TEFCA_Poster_Jordan_Pulaski.pptx
@@ -226,7 +226,7 @@
 <file path=ppt/revisionInfo.xml><?xml version="1.0" encoding="utf-8"?>
 <p1510:revInfo xmlns:a="http://schemas.openxmlformats.org/drawingml/2006/main" xmlns:r="http://schemas.openxmlformats.org/officeDocument/2006/relationships" xmlns:p1510="http://schemas.microsoft.com/office/powerpoint/2015/10/main">
   <p1510:revLst>
-    <p1510:client id="{ECF8852F-3FCF-4736-A5DC-07A8B6B99125}" v="16" dt="2026-07-27T21:13:31.040"/>
+    <p1510:client id="{ECF8852F-3FCF-4736-A5DC-07A8B6B99125}" v="36" dt="2026-08-06T21:32:29.530"/>
   </p1510:revLst>
 </p1510:revInfo>
 </file>
@@ -236,18 +236,26 @@
   <pc:docChgLst>
     <pc:chgData name="Pulaski, Jordan A" userId="b59e5678-eb70-4bba-8605-0c3b286199fc" providerId="ADAL" clId="{ECF8852F-3FCF-4736-A5DC-07A8B6B99125}"/>
     <pc:docChg chg="undo redo custSel modSld">
-      <pc:chgData name="Pulaski, Jordan A" userId="b59e5678-eb70-4bba-8605-0c3b286199fc" providerId="ADAL" clId="{ECF8852F-3FCF-4736-A5DC-07A8B6B99125}" dt="2026-07-27T21:49:38.674" v="414" actId="1076"/>
+      <pc:chgData name="Pulaski, Jordan A" userId="b59e5678-eb70-4bba-8605-0c3b286199fc" providerId="ADAL" clId="{ECF8852F-3FCF-4736-A5DC-07A8B6B99125}" dt="2026-08-07T02:30:58.933" v="1257" actId="14100"/>
       <pc:docMkLst>
         <pc:docMk/>
       </pc:docMkLst>
       <pc:sldChg chg="addSp delSp modSp mod">
-        <pc:chgData name="Pulaski, Jordan A" userId="b59e5678-eb70-4bba-8605-0c3b286199fc" providerId="ADAL" clId="{ECF8852F-3FCF-4736-A5DC-07A8B6B99125}" dt="2026-07-27T21:49:38.674" v="414" actId="1076"/>
+        <pc:chgData name="Pulaski, Jordan A" userId="b59e5678-eb70-4bba-8605-0c3b286199fc" providerId="ADAL" clId="{ECF8852F-3FCF-4736-A5DC-07A8B6B99125}" dt="2026-08-07T02:30:58.933" v="1257" actId="14100"/>
         <pc:sldMkLst>
           <pc:docMk/>
           <pc:sldMk cId="0" sldId="256"/>
         </pc:sldMkLst>
         <pc:spChg chg="mod">
-          <ac:chgData name="Pulaski, Jordan A" userId="b59e5678-eb70-4bba-8605-0c3b286199fc" providerId="ADAL" clId="{ECF8852F-3FCF-4736-A5DC-07A8B6B99125}" dt="2026-07-27T20:41:04.191" v="160" actId="255"/>
+          <ac:chgData name="Pulaski, Jordan A" userId="b59e5678-eb70-4bba-8605-0c3b286199fc" providerId="ADAL" clId="{ECF8852F-3FCF-4736-A5DC-07A8B6B99125}" dt="2026-08-04T20:31:06.199" v="584" actId="1076"/>
+          <ac:spMkLst>
+            <pc:docMk/>
+            <pc:sldMk cId="0" sldId="256"/>
+            <ac:spMk id="6" creationId="{00000000-0000-0000-0000-000000000000}"/>
+          </ac:spMkLst>
+        </pc:spChg>
+        <pc:spChg chg="mod">
+          <ac:chgData name="Pulaski, Jordan A" userId="b59e5678-eb70-4bba-8605-0c3b286199fc" providerId="ADAL" clId="{ECF8852F-3FCF-4736-A5DC-07A8B6B99125}" dt="2026-08-06T21:24:25.675" v="1188" actId="1076"/>
           <ac:spMkLst>
             <pc:docMk/>
             <pc:sldMk cId="0" sldId="256"/>
@@ -255,7 +263,7 @@
           </ac:spMkLst>
         </pc:spChg>
         <pc:spChg chg="mod">
-          <ac:chgData name="Pulaski, Jordan A" userId="b59e5678-eb70-4bba-8605-0c3b286199fc" providerId="ADAL" clId="{ECF8852F-3FCF-4736-A5DC-07A8B6B99125}" dt="2026-07-27T20:36:35.512" v="147" actId="1076"/>
+          <ac:chgData name="Pulaski, Jordan A" userId="b59e5678-eb70-4bba-8605-0c3b286199fc" providerId="ADAL" clId="{ECF8852F-3FCF-4736-A5DC-07A8B6B99125}" dt="2026-08-07T02:27:45.261" v="1231" actId="1076"/>
           <ac:spMkLst>
             <pc:docMk/>
             <pc:sldMk cId="0" sldId="256"/>
@@ -263,7 +271,7 @@
           </ac:spMkLst>
         </pc:spChg>
         <pc:spChg chg="mod">
-          <ac:chgData name="Pulaski, Jordan A" userId="b59e5678-eb70-4bba-8605-0c3b286199fc" providerId="ADAL" clId="{ECF8852F-3FCF-4736-A5DC-07A8B6B99125}" dt="2026-07-27T20:41:07.598" v="161" actId="255"/>
+          <ac:chgData name="Pulaski, Jordan A" userId="b59e5678-eb70-4bba-8605-0c3b286199fc" providerId="ADAL" clId="{ECF8852F-3FCF-4736-A5DC-07A8B6B99125}" dt="2026-08-04T20:16:33.719" v="429" actId="14100"/>
           <ac:spMkLst>
             <pc:docMk/>
             <pc:sldMk cId="0" sldId="256"/>
@@ -271,7 +279,7 @@
           </ac:spMkLst>
         </pc:spChg>
         <pc:spChg chg="mod">
-          <ac:chgData name="Pulaski, Jordan A" userId="b59e5678-eb70-4bba-8605-0c3b286199fc" providerId="ADAL" clId="{ECF8852F-3FCF-4736-A5DC-07A8B6B99125}" dt="2026-07-27T21:18:42.669" v="398" actId="20577"/>
+          <ac:chgData name="Pulaski, Jordan A" userId="b59e5678-eb70-4bba-8605-0c3b286199fc" providerId="ADAL" clId="{ECF8852F-3FCF-4736-A5DC-07A8B6B99125}" dt="2026-08-06T21:19:23.727" v="1171" actId="14100"/>
           <ac:spMkLst>
             <pc:docMk/>
             <pc:sldMk cId="0" sldId="256"/>
@@ -287,11 +295,19 @@
           </ac:spMkLst>
         </pc:spChg>
         <pc:spChg chg="mod">
-          <ac:chgData name="Pulaski, Jordan A" userId="b59e5678-eb70-4bba-8605-0c3b286199fc" providerId="ADAL" clId="{ECF8852F-3FCF-4736-A5DC-07A8B6B99125}" dt="2026-07-27T20:49:51.204" v="218" actId="14100"/>
+          <ac:chgData name="Pulaski, Jordan A" userId="b59e5678-eb70-4bba-8605-0c3b286199fc" providerId="ADAL" clId="{ECF8852F-3FCF-4736-A5DC-07A8B6B99125}" dt="2026-08-06T20:25:00.223" v="1084" actId="1076"/>
           <ac:spMkLst>
             <pc:docMk/>
             <pc:sldMk cId="0" sldId="256"/>
             <ac:spMk id="27" creationId="{00000000-0000-0000-0000-000000000000}"/>
+          </ac:spMkLst>
+        </pc:spChg>
+        <pc:spChg chg="mod">
+          <ac:chgData name="Pulaski, Jordan A" userId="b59e5678-eb70-4bba-8605-0c3b286199fc" providerId="ADAL" clId="{ECF8852F-3FCF-4736-A5DC-07A8B6B99125}" dt="2026-08-06T21:23:22.571" v="1183" actId="1076"/>
+          <ac:spMkLst>
+            <pc:docMk/>
+            <pc:sldMk cId="0" sldId="256"/>
+            <ac:spMk id="29" creationId="{00000000-0000-0000-0000-000000000000}"/>
           </ac:spMkLst>
         </pc:spChg>
         <pc:spChg chg="mod">
@@ -303,7 +319,7 @@
           </ac:spMkLst>
         </pc:spChg>
         <pc:spChg chg="mod">
-          <ac:chgData name="Pulaski, Jordan A" userId="b59e5678-eb70-4bba-8605-0c3b286199fc" providerId="ADAL" clId="{ECF8852F-3FCF-4736-A5DC-07A8B6B99125}" dt="2026-07-27T20:48:21.032" v="208" actId="14100"/>
+          <ac:chgData name="Pulaski, Jordan A" userId="b59e5678-eb70-4bba-8605-0c3b286199fc" providerId="ADAL" clId="{ECF8852F-3FCF-4736-A5DC-07A8B6B99125}" dt="2026-08-06T20:30:36.285" v="1137" actId="1076"/>
           <ac:spMkLst>
             <pc:docMk/>
             <pc:sldMk cId="0" sldId="256"/>
@@ -311,7 +327,7 @@
           </ac:spMkLst>
         </pc:spChg>
         <pc:spChg chg="mod">
-          <ac:chgData name="Pulaski, Jordan A" userId="b59e5678-eb70-4bba-8605-0c3b286199fc" providerId="ADAL" clId="{ECF8852F-3FCF-4736-A5DC-07A8B6B99125}" dt="2026-07-27T21:14:23.637" v="362" actId="1076"/>
+          <ac:chgData name="Pulaski, Jordan A" userId="b59e5678-eb70-4bba-8605-0c3b286199fc" providerId="ADAL" clId="{ECF8852F-3FCF-4736-A5DC-07A8B6B99125}" dt="2026-08-06T21:19:39.755" v="1181" actId="12"/>
           <ac:spMkLst>
             <pc:docMk/>
             <pc:sldMk cId="0" sldId="256"/>
@@ -319,7 +335,7 @@
           </ac:spMkLst>
         </pc:spChg>
         <pc:spChg chg="mod">
-          <ac:chgData name="Pulaski, Jordan A" userId="b59e5678-eb70-4bba-8605-0c3b286199fc" providerId="ADAL" clId="{ECF8852F-3FCF-4736-A5DC-07A8B6B99125}" dt="2026-07-27T21:18:49.644" v="400" actId="20577"/>
+          <ac:chgData name="Pulaski, Jordan A" userId="b59e5678-eb70-4bba-8605-0c3b286199fc" providerId="ADAL" clId="{ECF8852F-3FCF-4736-A5DC-07A8B6B99125}" dt="2026-08-06T20:32:34.961" v="1156" actId="20577"/>
           <ac:spMkLst>
             <pc:docMk/>
             <pc:sldMk cId="0" sldId="256"/>
@@ -335,7 +351,7 @@
           </ac:spMkLst>
         </pc:spChg>
         <pc:spChg chg="mod">
-          <ac:chgData name="Pulaski, Jordan A" userId="b59e5678-eb70-4bba-8605-0c3b286199fc" providerId="ADAL" clId="{ECF8852F-3FCF-4736-A5DC-07A8B6B99125}" dt="2026-07-27T21:49:09.608" v="408" actId="1076"/>
+          <ac:chgData name="Pulaski, Jordan A" userId="b59e5678-eb70-4bba-8605-0c3b286199fc" providerId="ADAL" clId="{ECF8852F-3FCF-4736-A5DC-07A8B6B99125}" dt="2026-08-07T02:30:44.343" v="1256" actId="14100"/>
           <ac:spMkLst>
             <pc:docMk/>
             <pc:sldMk cId="0" sldId="256"/>
@@ -343,7 +359,7 @@
           </ac:spMkLst>
         </pc:spChg>
         <pc:spChg chg="mod">
-          <ac:chgData name="Pulaski, Jordan A" userId="b59e5678-eb70-4bba-8605-0c3b286199fc" providerId="ADAL" clId="{ECF8852F-3FCF-4736-A5DC-07A8B6B99125}" dt="2026-07-27T21:49:21.587" v="410" actId="1076"/>
+          <ac:chgData name="Pulaski, Jordan A" userId="b59e5678-eb70-4bba-8605-0c3b286199fc" providerId="ADAL" clId="{ECF8852F-3FCF-4736-A5DC-07A8B6B99125}" dt="2026-08-07T02:30:58.933" v="1257" actId="14100"/>
           <ac:spMkLst>
             <pc:docMk/>
             <pc:sldMk cId="0" sldId="256"/>
@@ -351,7 +367,7 @@
           </ac:spMkLst>
         </pc:spChg>
         <pc:spChg chg="mod">
-          <ac:chgData name="Pulaski, Jordan A" userId="b59e5678-eb70-4bba-8605-0c3b286199fc" providerId="ADAL" clId="{ECF8852F-3FCF-4736-A5DC-07A8B6B99125}" dt="2026-07-27T21:49:38.674" v="414" actId="1076"/>
+          <ac:chgData name="Pulaski, Jordan A" userId="b59e5678-eb70-4bba-8605-0c3b286199fc" providerId="ADAL" clId="{ECF8852F-3FCF-4736-A5DC-07A8B6B99125}" dt="2026-08-07T02:30:32.217" v="1255" actId="14100"/>
           <ac:spMkLst>
             <pc:docMk/>
             <pc:sldMk cId="0" sldId="256"/>
@@ -359,7 +375,7 @@
           </ac:spMkLst>
         </pc:spChg>
         <pc:spChg chg="mod">
-          <ac:chgData name="Pulaski, Jordan A" userId="b59e5678-eb70-4bba-8605-0c3b286199fc" providerId="ADAL" clId="{ECF8852F-3FCF-4736-A5DC-07A8B6B99125}" dt="2026-07-27T21:49:01.495" v="407" actId="14100"/>
+          <ac:chgData name="Pulaski, Jordan A" userId="b59e5678-eb70-4bba-8605-0c3b286199fc" providerId="ADAL" clId="{ECF8852F-3FCF-4736-A5DC-07A8B6B99125}" dt="2026-08-07T02:29:07.875" v="1242" actId="5793"/>
           <ac:spMkLst>
             <pc:docMk/>
             <pc:sldMk cId="0" sldId="256"/>
@@ -367,7 +383,7 @@
           </ac:spMkLst>
         </pc:spChg>
         <pc:spChg chg="mod">
-          <ac:chgData name="Pulaski, Jordan A" userId="b59e5678-eb70-4bba-8605-0c3b286199fc" providerId="ADAL" clId="{ECF8852F-3FCF-4736-A5DC-07A8B6B99125}" dt="2026-07-27T20:40:52.590" v="159" actId="255"/>
+          <ac:chgData name="Pulaski, Jordan A" userId="b59e5678-eb70-4bba-8605-0c3b286199fc" providerId="ADAL" clId="{ECF8852F-3FCF-4736-A5DC-07A8B6B99125}" dt="2026-08-06T21:24:05.787" v="1186" actId="14100"/>
           <ac:spMkLst>
             <pc:docMk/>
             <pc:sldMk cId="0" sldId="256"/>
@@ -375,7 +391,7 @@
           </ac:spMkLst>
         </pc:spChg>
         <pc:spChg chg="mod">
-          <ac:chgData name="Pulaski, Jordan A" userId="b59e5678-eb70-4bba-8605-0c3b286199fc" providerId="ADAL" clId="{ECF8852F-3FCF-4736-A5DC-07A8B6B99125}" dt="2026-07-27T20:50:29.901" v="222" actId="1076"/>
+          <ac:chgData name="Pulaski, Jordan A" userId="b59e5678-eb70-4bba-8605-0c3b286199fc" providerId="ADAL" clId="{ECF8852F-3FCF-4736-A5DC-07A8B6B99125}" dt="2026-08-06T20:30:45.276" v="1139" actId="1076"/>
           <ac:spMkLst>
             <pc:docMk/>
             <pc:sldMk cId="0" sldId="256"/>
@@ -383,7 +399,7 @@
           </ac:spMkLst>
         </pc:spChg>
         <pc:spChg chg="mod">
-          <ac:chgData name="Pulaski, Jordan A" userId="b59e5678-eb70-4bba-8605-0c3b286199fc" providerId="ADAL" clId="{ECF8852F-3FCF-4736-A5DC-07A8B6B99125}" dt="2026-07-27T21:14:38.167" v="363" actId="1076"/>
+          <ac:chgData name="Pulaski, Jordan A" userId="b59e5678-eb70-4bba-8605-0c3b286199fc" providerId="ADAL" clId="{ECF8852F-3FCF-4736-A5DC-07A8B6B99125}" dt="2026-08-04T23:07:38.296" v="849" actId="1076"/>
           <ac:spMkLst>
             <pc:docMk/>
             <pc:sldMk cId="0" sldId="256"/>
@@ -391,7 +407,7 @@
           </ac:spMkLst>
         </pc:spChg>
         <pc:spChg chg="mod">
-          <ac:chgData name="Pulaski, Jordan A" userId="b59e5678-eb70-4bba-8605-0c3b286199fc" providerId="ADAL" clId="{ECF8852F-3FCF-4736-A5DC-07A8B6B99125}" dt="2026-07-27T20:41:27.079" v="163" actId="1076"/>
+          <ac:chgData name="Pulaski, Jordan A" userId="b59e5678-eb70-4bba-8605-0c3b286199fc" providerId="ADAL" clId="{ECF8852F-3FCF-4736-A5DC-07A8B6B99125}" dt="2026-08-06T21:24:39.088" v="1189" actId="1076"/>
           <ac:spMkLst>
             <pc:docMk/>
             <pc:sldMk cId="0" sldId="256"/>
@@ -399,19 +415,19 @@
           </ac:spMkLst>
         </pc:spChg>
         <pc:spChg chg="mod">
-          <ac:chgData name="Pulaski, Jordan A" userId="b59e5678-eb70-4bba-8605-0c3b286199fc" providerId="ADAL" clId="{ECF8852F-3FCF-4736-A5DC-07A8B6B99125}" dt="2026-07-27T21:49:31.492" v="413" actId="1076"/>
+          <ac:chgData name="Pulaski, Jordan A" userId="b59e5678-eb70-4bba-8605-0c3b286199fc" providerId="ADAL" clId="{ECF8852F-3FCF-4736-A5DC-07A8B6B99125}" dt="2026-08-07T02:28:26.916" v="1236" actId="207"/>
           <ac:spMkLst>
             <pc:docMk/>
             <pc:sldMk cId="0" sldId="256"/>
             <ac:spMk id="1052" creationId="{ECAF7F30-4242-F28F-CC63-2CF9D23A54BF}"/>
           </ac:spMkLst>
         </pc:spChg>
-        <pc:spChg chg="add del mod">
-          <ac:chgData name="Pulaski, Jordan A" userId="b59e5678-eb70-4bba-8605-0c3b286199fc" providerId="ADAL" clId="{ECF8852F-3FCF-4736-A5DC-07A8B6B99125}" dt="2026-07-27T21:04:33.784" v="258" actId="478"/>
+        <pc:spChg chg="mod">
+          <ac:chgData name="Pulaski, Jordan A" userId="b59e5678-eb70-4bba-8605-0c3b286199fc" providerId="ADAL" clId="{ECF8852F-3FCF-4736-A5DC-07A8B6B99125}" dt="2026-08-06T20:33:18.684" v="1165" actId="14100"/>
           <ac:spMkLst>
             <pc:docMk/>
             <pc:sldMk cId="0" sldId="256"/>
-            <ac:spMk id="1066" creationId="{A9AC913A-78A9-B672-DD13-D3B761320305}"/>
+            <ac:spMk id="1056" creationId="{F140CDA7-5B52-B7EA-8E16-C3C4D6246264}"/>
           </ac:spMkLst>
         </pc:spChg>
         <pc:spChg chg="add mod">
@@ -422,16 +438,8 @@
             <ac:spMk id="1067" creationId="{90FF7E03-AF81-5A22-01FA-EF6B8005E07B}"/>
           </ac:spMkLst>
         </pc:spChg>
-        <pc:spChg chg="add del mod">
-          <ac:chgData name="Pulaski, Jordan A" userId="b59e5678-eb70-4bba-8605-0c3b286199fc" providerId="ADAL" clId="{ECF8852F-3FCF-4736-A5DC-07A8B6B99125}" dt="2026-07-27T21:06:54.980" v="266" actId="478"/>
-          <ac:spMkLst>
-            <pc:docMk/>
-            <pc:sldMk cId="0" sldId="256"/>
-            <ac:spMk id="1068" creationId="{09C5D111-8D29-EF8E-7EC6-17FA88828792}"/>
-          </ac:spMkLst>
-        </pc:spChg>
         <pc:spChg chg="add mod">
-          <ac:chgData name="Pulaski, Jordan A" userId="b59e5678-eb70-4bba-8605-0c3b286199fc" providerId="ADAL" clId="{ECF8852F-3FCF-4736-A5DC-07A8B6B99125}" dt="2026-07-27T21:13:31.038" v="360" actId="1076"/>
+          <ac:chgData name="Pulaski, Jordan A" userId="b59e5678-eb70-4bba-8605-0c3b286199fc" providerId="ADAL" clId="{ECF8852F-3FCF-4736-A5DC-07A8B6B99125}" dt="2026-08-06T21:32:29.527" v="1228" actId="1076"/>
           <ac:spMkLst>
             <pc:docMk/>
             <pc:sldMk cId="0" sldId="256"/>
@@ -439,7 +447,15 @@
           </ac:spMkLst>
         </pc:spChg>
         <pc:spChg chg="mod">
-          <ac:chgData name="Pulaski, Jordan A" userId="b59e5678-eb70-4bba-8605-0c3b286199fc" providerId="ADAL" clId="{ECF8852F-3FCF-4736-A5DC-07A8B6B99125}" dt="2026-07-27T20:34:21.247" v="132" actId="1076"/>
+          <ac:chgData name="Pulaski, Jordan A" userId="b59e5678-eb70-4bba-8605-0c3b286199fc" providerId="ADAL" clId="{ECF8852F-3FCF-4736-A5DC-07A8B6B99125}" dt="2026-08-06T20:33:01.798" v="1161" actId="1076"/>
+          <ac:spMkLst>
+            <pc:docMk/>
+            <pc:sldMk cId="0" sldId="256"/>
+            <ac:spMk id="2050" creationId="{00000000-0000-0000-0000-000000000000}"/>
+          </ac:spMkLst>
+        </pc:spChg>
+        <pc:spChg chg="mod">
+          <ac:chgData name="Pulaski, Jordan A" userId="b59e5678-eb70-4bba-8605-0c3b286199fc" providerId="ADAL" clId="{ECF8852F-3FCF-4736-A5DC-07A8B6B99125}" dt="2026-08-06T20:30:26.350" v="1136" actId="14100"/>
           <ac:spMkLst>
             <pc:docMk/>
             <pc:sldMk cId="0" sldId="256"/>
@@ -447,15 +463,23 @@
           </ac:spMkLst>
         </pc:spChg>
         <pc:spChg chg="mod">
-          <ac:chgData name="Pulaski, Jordan A" userId="b59e5678-eb70-4bba-8605-0c3b286199fc" providerId="ADAL" clId="{ECF8852F-3FCF-4736-A5DC-07A8B6B99125}" dt="2026-07-27T20:36:46.429" v="149" actId="14100"/>
+          <ac:chgData name="Pulaski, Jordan A" userId="b59e5678-eb70-4bba-8605-0c3b286199fc" providerId="ADAL" clId="{ECF8852F-3FCF-4736-A5DC-07A8B6B99125}" dt="2026-08-06T20:23:11.132" v="1070" actId="1076"/>
           <ac:spMkLst>
             <pc:docMk/>
             <pc:sldMk cId="0" sldId="256"/>
             <ac:spMk id="2057" creationId="{00000000-0000-0000-0000-000000000000}"/>
           </ac:spMkLst>
         </pc:spChg>
+        <pc:graphicFrameChg chg="modGraphic">
+          <ac:chgData name="Pulaski, Jordan A" userId="b59e5678-eb70-4bba-8605-0c3b286199fc" providerId="ADAL" clId="{ECF8852F-3FCF-4736-A5DC-07A8B6B99125}" dt="2026-08-06T20:14:09.681" v="932" actId="403"/>
+          <ac:graphicFrameMkLst>
+            <pc:docMk/>
+            <pc:sldMk cId="0" sldId="256"/>
+            <ac:graphicFrameMk id="9" creationId="{C91030CC-5967-3D82-32C6-E8F574FD0450}"/>
+          </ac:graphicFrameMkLst>
+        </pc:graphicFrameChg>
         <pc:picChg chg="mod">
-          <ac:chgData name="Pulaski, Jordan A" userId="b59e5678-eb70-4bba-8605-0c3b286199fc" providerId="ADAL" clId="{ECF8852F-3FCF-4736-A5DC-07A8B6B99125}" dt="2026-07-27T20:34:08.153" v="130" actId="14100"/>
+          <ac:chgData name="Pulaski, Jordan A" userId="b59e5678-eb70-4bba-8605-0c3b286199fc" providerId="ADAL" clId="{ECF8852F-3FCF-4736-A5DC-07A8B6B99125}" dt="2026-08-06T20:24:54.194" v="1083" actId="1076"/>
           <ac:picMkLst>
             <pc:docMk/>
             <pc:sldMk cId="0" sldId="256"/>
@@ -463,7 +487,15 @@
           </ac:picMkLst>
         </pc:picChg>
         <pc:picChg chg="mod">
-          <ac:chgData name="Pulaski, Jordan A" userId="b59e5678-eb70-4bba-8605-0c3b286199fc" providerId="ADAL" clId="{ECF8852F-3FCF-4736-A5DC-07A8B6B99125}" dt="2026-07-27T20:48:10.069" v="207" actId="1076"/>
+          <ac:chgData name="Pulaski, Jordan A" userId="b59e5678-eb70-4bba-8605-0c3b286199fc" providerId="ADAL" clId="{ECF8852F-3FCF-4736-A5DC-07A8B6B99125}" dt="2026-08-06T20:33:10.699" v="1163" actId="1076"/>
+          <ac:picMkLst>
+            <pc:docMk/>
+            <pc:sldMk cId="0" sldId="256"/>
+            <ac:picMk id="1054" creationId="{758EA137-C048-0225-7DCD-24A1F8C2EFEA}"/>
+          </ac:picMkLst>
+        </pc:picChg>
+        <pc:picChg chg="mod">
+          <ac:chgData name="Pulaski, Jordan A" userId="b59e5678-eb70-4bba-8605-0c3b286199fc" providerId="ADAL" clId="{ECF8852F-3FCF-4736-A5DC-07A8B6B99125}" dt="2026-08-06T20:32:11.004" v="1150" actId="1076"/>
           <ac:picMkLst>
             <pc:docMk/>
             <pc:sldMk cId="0" sldId="256"/>
@@ -471,7 +503,7 @@
           </ac:picMkLst>
         </pc:picChg>
         <pc:cxnChg chg="mod">
-          <ac:chgData name="Pulaski, Jordan A" userId="b59e5678-eb70-4bba-8605-0c3b286199fc" providerId="ADAL" clId="{ECF8852F-3FCF-4736-A5DC-07A8B6B99125}" dt="2026-07-27T21:49:12.774" v="409" actId="1076"/>
+          <ac:chgData name="Pulaski, Jordan A" userId="b59e5678-eb70-4bba-8605-0c3b286199fc" providerId="ADAL" clId="{ECF8852F-3FCF-4736-A5DC-07A8B6B99125}" dt="2026-08-06T21:31:12.289" v="1223" actId="1076"/>
           <ac:cxnSpMkLst>
             <pc:docMk/>
             <pc:sldMk cId="0" sldId="256"/>
@@ -479,7 +511,7 @@
           </ac:cxnSpMkLst>
         </pc:cxnChg>
         <pc:cxnChg chg="mod">
-          <ac:chgData name="Pulaski, Jordan A" userId="b59e5678-eb70-4bba-8605-0c3b286199fc" providerId="ADAL" clId="{ECF8852F-3FCF-4736-A5DC-07A8B6B99125}" dt="2026-07-27T21:49:27.345" v="411" actId="1076"/>
+          <ac:chgData name="Pulaski, Jordan A" userId="b59e5678-eb70-4bba-8605-0c3b286199fc" providerId="ADAL" clId="{ECF8852F-3FCF-4736-A5DC-07A8B6B99125}" dt="2026-08-06T21:30:59.701" v="1221" actId="1076"/>
           <ac:cxnSpMkLst>
             <pc:docMk/>
             <pc:sldMk cId="0" sldId="256"/>
@@ -4297,16 +4329,15 @@
         </p:nvSpPr>
         <p:spPr bwMode="auto">
           <a:xfrm>
-            <a:off x="329374" y="12617129"/>
-            <a:ext cx="13322618" cy="2167470"/>
+            <a:off x="685800" y="13137674"/>
+            <a:ext cx="12801600" cy="1717781"/>
           </a:xfrm>
           <a:prstGeom prst="rect">
             <a:avLst/>
           </a:prstGeom>
           <a:solidFill>
-            <a:schemeClr val="tx2">
-              <a:lumMod val="95000"/>
-              <a:lumOff val="5000"/>
+            <a:schemeClr val="accent5">
+              <a:lumMod val="25000"/>
             </a:schemeClr>
           </a:solidFill>
           <a:ln w="9525" cap="flat" cmpd="sng" algn="ctr">
@@ -4432,7 +4463,7 @@
         </p:nvSpPr>
         <p:spPr bwMode="auto">
           <a:xfrm>
-            <a:off x="21579840" y="15299973"/>
+            <a:off x="21611250" y="15583423"/>
             <a:ext cx="11109959" cy="17246342"/>
           </a:xfrm>
           <a:prstGeom prst="rect">
@@ -4476,7 +4507,7 @@
               <a:buNone/>
               <a:tabLst/>
             </a:pPr>
-            <a:endParaRPr kumimoji="0" lang="en-US" sz="6200" b="0" i="0" u="none" strike="noStrike" cap="none" normalizeH="0" baseline="0">
+            <a:endParaRPr kumimoji="0" lang="en-US" sz="6200" b="0" i="0" u="none" strike="noStrike" cap="none" normalizeH="0" baseline="0" dirty="0">
               <a:ln>
                 <a:noFill/>
               </a:ln>
@@ -4511,8 +4542,8 @@
         </p:blipFill>
         <p:spPr>
           <a:xfrm>
-            <a:off x="914400" y="248488"/>
-            <a:ext cx="4917421" cy="4912503"/>
+            <a:off x="915602" y="129063"/>
+            <a:ext cx="4688821" cy="4684132"/>
           </a:xfrm>
           <a:prstGeom prst="rect">
             <a:avLst/>
@@ -4530,7 +4561,7 @@
         <p:spPr bwMode="auto">
           <a:xfrm>
             <a:off x="6629400" y="0"/>
-            <a:ext cx="32689799" cy="5174460"/>
+            <a:ext cx="32689799" cy="5010260"/>
           </a:xfrm>
           <a:prstGeom prst="rect">
             <a:avLst/>
@@ -4570,7 +4601,7 @@
         </p:nvSpPr>
         <p:spPr bwMode="auto">
           <a:xfrm>
-            <a:off x="329374" y="14859000"/>
+            <a:off x="223625" y="14906712"/>
             <a:ext cx="20930425" cy="794358"/>
           </a:xfrm>
           <a:prstGeom prst="rect">
@@ -4807,8 +4838,8 @@
         </p:nvSpPr>
         <p:spPr bwMode="auto">
           <a:xfrm>
-            <a:off x="29632703" y="5279824"/>
-            <a:ext cx="13453824" cy="801867"/>
+            <a:off x="29285716" y="5100825"/>
+            <a:ext cx="13790811" cy="803894"/>
           </a:xfrm>
           <a:prstGeom prst="rect">
             <a:avLst/>
@@ -4865,8 +4896,8 @@
         </p:nvSpPr>
         <p:spPr bwMode="auto">
           <a:xfrm>
-            <a:off x="29654543" y="6087637"/>
-            <a:ext cx="6714697" cy="7426943"/>
+            <a:off x="29352242" y="5885081"/>
+            <a:ext cx="6749613" cy="7165333"/>
           </a:xfrm>
           <a:prstGeom prst="rect">
             <a:avLst/>
@@ -4902,7 +4933,83 @@
                 <a:latin typeface="Arial" pitchFamily="34" charset="0"/>
                 <a:cs typeface="Arial" pitchFamily="34" charset="0"/>
               </a:rPr>
-              <a:t>. Among 691 hospitals, 112 (16.2%) reported current TEFCA participation, 289 (41.8%) planned participation, and 290 (42.0%) neither current nor planned. In the adjusted primary model, current participation was associated with a 0.108-point higher Hybrid HWM score than planned participation (95% CI, 0.001–0.216; </a:t>
+              <a:t>. </a:t>
+            </a:r>
+          </a:p>
+          <a:p>
+            <a:pPr defTabSz="3458871">
+              <a:spcBef>
+                <a:spcPct val="50000"/>
+              </a:spcBef>
+            </a:pPr>
+            <a:r>
+              <a:rPr lang="en-US" sz="3400" dirty="0">
+                <a:latin typeface="Arial" pitchFamily="34" charset="0"/>
+                <a:cs typeface="Arial" pitchFamily="34" charset="0"/>
+              </a:rPr>
+              <a:t>691 hospitals</a:t>
+            </a:r>
+          </a:p>
+          <a:p>
+            <a:pPr marL="457200" indent="-457200" defTabSz="3458871">
+              <a:spcBef>
+                <a:spcPct val="50000"/>
+              </a:spcBef>
+              <a:buFont typeface="Arial" panose="020B0604020202020204" pitchFamily="34" charset="0"/>
+              <a:buChar char="•"/>
+            </a:pPr>
+            <a:r>
+              <a:rPr lang="en-US" sz="3400" dirty="0">
+                <a:latin typeface="Arial" pitchFamily="34" charset="0"/>
+                <a:cs typeface="Arial" pitchFamily="34" charset="0"/>
+              </a:rPr>
+              <a:t>112 (16.2%) currently in TEFCA</a:t>
+            </a:r>
+          </a:p>
+          <a:p>
+            <a:pPr marL="457200" indent="-457200" defTabSz="3458871">
+              <a:spcBef>
+                <a:spcPct val="50000"/>
+              </a:spcBef>
+              <a:buFont typeface="Arial" panose="020B0604020202020204" pitchFamily="34" charset="0"/>
+              <a:buChar char="•"/>
+            </a:pPr>
+            <a:r>
+              <a:rPr lang="en-US" sz="3400" dirty="0">
+                <a:latin typeface="Arial" pitchFamily="34" charset="0"/>
+                <a:cs typeface="Arial" pitchFamily="34" charset="0"/>
+              </a:rPr>
+              <a:t>289 (41.8%) planned TEFCA</a:t>
+            </a:r>
+          </a:p>
+          <a:p>
+            <a:pPr marL="457200" indent="-457200" defTabSz="3458871">
+              <a:spcBef>
+                <a:spcPct val="50000"/>
+              </a:spcBef>
+              <a:buFont typeface="Arial" panose="020B0604020202020204" pitchFamily="34" charset="0"/>
+              <a:buChar char="•"/>
+            </a:pPr>
+            <a:r>
+              <a:rPr lang="en-US" sz="3400" dirty="0">
+                <a:latin typeface="Arial" pitchFamily="34" charset="0"/>
+                <a:cs typeface="Arial" pitchFamily="34" charset="0"/>
+              </a:rPr>
+              <a:t>290 (42.0%) neither</a:t>
+            </a:r>
+          </a:p>
+          <a:p>
+            <a:pPr defTabSz="3458871">
+              <a:spcBef>
+                <a:spcPct val="50000"/>
+              </a:spcBef>
+            </a:pPr>
+            <a:r>
+              <a:rPr lang="en-US" sz="3400" dirty="0">
+                <a:latin typeface="Arial" pitchFamily="34" charset="0"/>
+                <a:cs typeface="Arial" pitchFamily="34" charset="0"/>
+              </a:rPr>
+              <a:t>In the adjusted primary model:  current participation associated with 0.108-point higher Hybrid HWM score than planned participation (95% CI, 0.001–0.216; </a:t>
             </a:r>
             <a:r>
               <a:rPr lang="en-US" sz="3400" i="1" dirty="0">
@@ -4916,7 +5023,7 @@
                 <a:latin typeface="Arial" pitchFamily="34" charset="0"/>
                 <a:cs typeface="Arial" pitchFamily="34" charset="0"/>
               </a:rPr>
-              <a:t> = .047). The estimate, therefore, did not support lower mortality with current participation.</a:t>
+              <a:t> = .047).</a:t>
             </a:r>
           </a:p>
         </p:txBody>
@@ -4931,8 +5038,8 @@
         </p:nvSpPr>
         <p:spPr bwMode="auto">
           <a:xfrm>
-            <a:off x="365760" y="5290931"/>
-            <a:ext cx="13578840" cy="794358"/>
+            <a:off x="223625" y="5089573"/>
+            <a:ext cx="13786253" cy="794358"/>
           </a:xfrm>
           <a:prstGeom prst="rect">
             <a:avLst/>
@@ -4981,8 +5088,8 @@
         </p:nvSpPr>
         <p:spPr bwMode="auto">
           <a:xfrm>
-            <a:off x="14173200" y="5281083"/>
-            <a:ext cx="15122516" cy="794358"/>
+            <a:off x="14263394" y="5096746"/>
+            <a:ext cx="14768806" cy="794358"/>
           </a:xfrm>
           <a:prstGeom prst="rect">
             <a:avLst/>
@@ -5039,8 +5146,8 @@
         </p:nvSpPr>
         <p:spPr bwMode="auto">
           <a:xfrm>
-            <a:off x="14263394" y="10867370"/>
-            <a:ext cx="15032322" cy="4018318"/>
+            <a:off x="14263394" y="10656283"/>
+            <a:ext cx="15032322" cy="4333789"/>
           </a:xfrm>
           <a:prstGeom prst="rect">
             <a:avLst/>
@@ -5118,15 +5225,8 @@
                 <a:latin typeface="Arial" pitchFamily="34" charset="0"/>
                 <a:cs typeface="Arial" pitchFamily="34" charset="0"/>
               </a:rPr>
-              <a:t> Adjusted OLS models compared current and neither status with planned participation, controlling for national network, EHR vendor network, and HIO participation, log CMS denominator, state, and survey year</a:t>
-            </a:r>
-          </a:p>
-          <a:p>
-            <a:pPr defTabSz="3458871">
-              <a:spcBef>
-                <a:spcPct val="50000"/>
-              </a:spcBef>
-            </a:pPr>
+              <a:t> Adjusted OLS models compared current and neither status with planned participation, controlling for national network, EHR vendor network, and HIO participation, log CMS denominator (total eligible patient population), state, and survey year. </a:t>
+            </a:r>
             <a:r>
               <a:rPr lang="en-US" sz="2700" i="1" dirty="0">
                 <a:latin typeface="Arial" pitchFamily="34" charset="0"/>
@@ -5139,7 +5239,7 @@
                 <a:latin typeface="Arial" pitchFamily="34" charset="0"/>
                 <a:cs typeface="Arial" pitchFamily="34" charset="0"/>
               </a:rPr>
-              <a:t>Missing TEFCA and other network-participation responses were coded as nonparticipation.</a:t>
+              <a:t>Missing TEFCA and other network participation responses were coded as nonparticipation.</a:t>
             </a:r>
           </a:p>
         </p:txBody>
@@ -5270,8 +5370,8 @@
         </p:nvSpPr>
         <p:spPr bwMode="auto">
           <a:xfrm>
-            <a:off x="347567" y="6047861"/>
-            <a:ext cx="13578840" cy="6642113"/>
+            <a:off x="258627" y="5792339"/>
+            <a:ext cx="13751251" cy="7426943"/>
           </a:xfrm>
           <a:prstGeom prst="rect">
             <a:avLst/>
@@ -5300,28 +5400,7 @@
                 <a:latin typeface="Arial" pitchFamily="34" charset="0"/>
                 <a:cs typeface="Arial" pitchFamily="34" charset="0"/>
               </a:rPr>
-              <a:t>The Trusted Exchange Framework and Common Agreement (TEFCA) was established to support nationwide electronic health information exchange (HIE) through a network-of-networks of Qualified Health Information Networks (QHINs).</a:t>
-            </a:r>
-            <a:r>
-              <a:rPr lang="en-US" sz="3400" baseline="30000" dirty="0">
-                <a:latin typeface="Arial" pitchFamily="34" charset="0"/>
-                <a:cs typeface="Arial" pitchFamily="34" charset="0"/>
-              </a:rPr>
-              <a:t>1</a:t>
-            </a:r>
-            <a:r>
-              <a:rPr lang="en-US" sz="3400" dirty="0">
-                <a:latin typeface="Arial" pitchFamily="34" charset="0"/>
-                <a:cs typeface="Arial" pitchFamily="34" charset="0"/>
-              </a:rPr>
-              <a:t> Prior HIE research has reported operational and utilization benefits, but evidence for mortality remains limited and largely observational, particularly during TEFCA’s early implementation.</a:t>
-            </a:r>
-            <a:r>
-              <a:rPr lang="en-US" sz="3400" baseline="30000" dirty="0">
-                <a:latin typeface="Arial" pitchFamily="34" charset="0"/>
-                <a:cs typeface="Arial" pitchFamily="34" charset="0"/>
-              </a:rPr>
-              <a:t>2–11 </a:t>
+              <a:t>The Trusted Exchange Framework and Common Agreement (TEFCA) is a national framework for electronic health information exchange (HIE). It connects separate networks through Qualified Health Information Networks (QHINs).¹</a:t>
             </a:r>
           </a:p>
           <a:p>
@@ -5335,14 +5414,49 @@
                 <a:latin typeface="Arial" pitchFamily="34" charset="0"/>
                 <a:cs typeface="Arial" pitchFamily="34" charset="0"/>
               </a:rPr>
-              <a:t>Objective</a:t>
+              <a:t>Evidence gap</a:t>
             </a:r>
             <a:r>
               <a:rPr lang="en-US" sz="3400" dirty="0">
                 <a:latin typeface="Arial" pitchFamily="34" charset="0"/>
                 <a:cs typeface="Arial" pitchFamily="34" charset="0"/>
               </a:rPr>
-              <a:t>: Examine whether current TEFCA participation, compared with planned participation, was associated with lower CMS Hybrid Hospital-Wide Mortality (Hybrid HWM) scores among U.S. non-federal acute care hospitals. Heart failure and pneumonia mortality were evaluated as secondary outcomes.</a:t>
+              <a:t>. Prior HIE research has reported operational and utilization benefits, but evidence of lower mortality remains limited and largely observational.</a:t>
+            </a:r>
+            <a:r>
+              <a:rPr lang="en-US" sz="3400" baseline="30000" dirty="0">
+                <a:latin typeface="Arial" pitchFamily="34" charset="0"/>
+                <a:cs typeface="Arial" pitchFamily="34" charset="0"/>
+              </a:rPr>
+              <a:t>2–11 </a:t>
+            </a:r>
+            <a:r>
+              <a:rPr lang="en-US" sz="3400" dirty="0">
+                <a:latin typeface="Arial" pitchFamily="34" charset="0"/>
+                <a:cs typeface="Arial" pitchFamily="34" charset="0"/>
+              </a:rPr>
+              <a:t>TEFCA’s relationship with mortality during early implementation is unclear.</a:t>
+            </a:r>
+          </a:p>
+          <a:p>
+            <a:pPr defTabSz="3458871">
+              <a:spcBef>
+                <a:spcPct val="50000"/>
+              </a:spcBef>
+            </a:pPr>
+            <a:r>
+              <a:rPr lang="en-US" sz="3400" b="1" dirty="0">
+                <a:latin typeface="Arial" pitchFamily="34" charset="0"/>
+                <a:cs typeface="Arial" pitchFamily="34" charset="0"/>
+              </a:rPr>
+              <a:t>Objective. </a:t>
+            </a:r>
+            <a:r>
+              <a:rPr lang="en-US" sz="3400" dirty="0">
+                <a:latin typeface="Arial" pitchFamily="34" charset="0"/>
+                <a:cs typeface="Arial" pitchFamily="34" charset="0"/>
+              </a:rPr>
+              <a:t>Determine whether U.S. non-federal acute care hospitals participating in TEFCA, versus hospitals planning to participate, were associated with lower mortality. The primary outcome was CMS Hybrid Hospital-Wide Mortality (Hybrid HWM); heart failure and pneumonia mortality were secondary outcomes</a:t>
             </a:r>
           </a:p>
         </p:txBody>
@@ -5584,8 +5698,8 @@
         </p:nvSpPr>
         <p:spPr bwMode="auto">
           <a:xfrm>
-            <a:off x="21774246" y="15824406"/>
-            <a:ext cx="10721145" cy="16844906"/>
+            <a:off x="21824359" y="15703244"/>
+            <a:ext cx="10721145" cy="17275793"/>
           </a:xfrm>
           <a:prstGeom prst="rect">
             <a:avLst/>
@@ -5610,18 +5724,18 @@
               </a:spcBef>
             </a:pPr>
             <a:r>
-              <a:rPr lang="en-US" sz="3400" b="1" dirty="0">
+              <a:rPr lang="en-US" sz="3600" b="1" dirty="0">
                 <a:latin typeface="Arial" pitchFamily="34" charset="0"/>
                 <a:cs typeface="Arial" pitchFamily="34" charset="0"/>
               </a:rPr>
               <a:t>Interpretation. </a:t>
             </a:r>
             <a:r>
-              <a:rPr lang="en-US" sz="3400" dirty="0">
+              <a:rPr lang="en-US" sz="3600" dirty="0">
                 <a:latin typeface="Arial" pitchFamily="34" charset="0"/>
                 <a:cs typeface="Arial" pitchFamily="34" charset="0"/>
               </a:rPr>
-              <a:t>Early participation in TEFCA was not robustly associated with lower mortality than planned participation. The small positive estimate should not be interpreted as evidence of harm: its statistical significance was sensitive to the standard-error method, and it was not reproduced for secondary outcomes. Clinical effects may require more time, fuller adoption, and routine exchange use to emerge.</a:t>
+              <a:t>Early TEFCA participation was not robustly associated with lower mortality than planned participation. The small positive estimate was sensitive to the standard-error method and absent for secondary outcomes; it should not be interpreted as evidence of harm. Effects may require longer, fuller adoption and routine exchange use.</a:t>
             </a:r>
           </a:p>
           <a:p>
@@ -5631,11 +5745,11 @@
               </a:spcBef>
             </a:pPr>
             <a:r>
-              <a:rPr lang="en-US" sz="3400" dirty="0">
+              <a:rPr lang="en-US" sz="3600" dirty="0">
                 <a:latin typeface="Arial" pitchFamily="34" charset="0"/>
                 <a:cs typeface="Arial" pitchFamily="34" charset="0"/>
               </a:rPr>
-              <a:t>EHR vendor-network participation was associated with lower Hybrid HWM, possibly reflecting more established exchange infrastructure or workflow integration, but this secondary finding does not establish causality.</a:t>
+              <a:t>EHR vendor network participation was associated with lower Hybrid HWM, possibly reflecting more established infrastructure or workflow integration, but this secondary finding does not establish causality.</a:t>
             </a:r>
           </a:p>
           <a:p>
@@ -5644,86 +5758,114 @@
                 <a:spcPct val="50000"/>
               </a:spcBef>
             </a:pPr>
-            <a:endParaRPr lang="en-US" sz="3400" dirty="0">
-              <a:latin typeface="Arial" pitchFamily="34" charset="0"/>
-              <a:cs typeface="Arial" pitchFamily="34" charset="0"/>
-            </a:endParaRPr>
-          </a:p>
-          <a:p>
-            <a:r>
-              <a:rPr lang="en-US" sz="3400" b="1" dirty="0"/>
+            <a:r>
+              <a:rPr lang="en-US" sz="3600" b="1" dirty="0">
+                <a:latin typeface="Arial" pitchFamily="34" charset="0"/>
+                <a:cs typeface="Arial" pitchFamily="34" charset="0"/>
+              </a:rPr>
               <a:t>Limitations.</a:t>
             </a:r>
           </a:p>
           <a:p>
-            <a:endParaRPr lang="en-US" sz="3400" b="1" dirty="0"/>
-          </a:p>
-          <a:p>
-            <a:pPr marL="457200" indent="-457200">
+            <a:pPr marL="457200" indent="-457200" defTabSz="3458871">
+              <a:spcBef>
+                <a:spcPct val="50000"/>
+              </a:spcBef>
               <a:buFont typeface="Arial" panose="020B0604020202020204" pitchFamily="34" charset="0"/>
               <a:buChar char="•"/>
             </a:pPr>
             <a:r>
-              <a:rPr lang="en-US" sz="3400" dirty="0"/>
-              <a:t>Cross-sectional hospital-level associations do not establish causality or within-hospital change.</a:t>
-            </a:r>
-          </a:p>
-          <a:p>
-            <a:pPr marL="457200" indent="-457200">
+              <a:rPr lang="en-US" sz="3600" dirty="0">
+                <a:latin typeface="Arial" pitchFamily="34" charset="0"/>
+                <a:cs typeface="Arial" pitchFamily="34" charset="0"/>
+              </a:rPr>
+              <a:t>Cross-sectional hospital comparisons cannot establish causality or within-hospital change.</a:t>
+            </a:r>
+          </a:p>
+          <a:p>
+            <a:pPr marL="457200" indent="-457200" defTabSz="3458871">
+              <a:spcBef>
+                <a:spcPct val="50000"/>
+              </a:spcBef>
               <a:buFont typeface="Arial" panose="020B0604020202020204" pitchFamily="34" charset="0"/>
               <a:buChar char="•"/>
             </a:pPr>
             <a:r>
-              <a:rPr lang="en-US" sz="3400" dirty="0"/>
-              <a:t>Survey responses captured reported participation—not exchange volume, duration, data quality, or workflow integration.</a:t>
-            </a:r>
-          </a:p>
-          <a:p>
-            <a:pPr marL="457200" indent="-457200">
+              <a:rPr lang="en-US" sz="3600" dirty="0">
+                <a:latin typeface="Arial" pitchFamily="34" charset="0"/>
+                <a:cs typeface="Arial" pitchFamily="34" charset="0"/>
+              </a:rPr>
+              <a:t>Surveys measured reported participation, not HIE volume, quality, or workflow integration.</a:t>
+            </a:r>
+          </a:p>
+          <a:p>
+            <a:pPr marL="457200" indent="-457200" defTabSz="3458871">
+              <a:spcBef>
+                <a:spcPct val="50000"/>
+              </a:spcBef>
               <a:buFont typeface="Arial" panose="020B0604020202020204" pitchFamily="34" charset="0"/>
               <a:buChar char="•"/>
             </a:pPr>
             <a:r>
-              <a:rPr lang="en-US" sz="3400" dirty="0"/>
-              <a:t>Planned hospitals may already use other exchange networks, narrowing the contrast.</a:t>
-            </a:r>
-          </a:p>
-          <a:p>
-            <a:pPr marL="457200" indent="-457200">
+              <a:rPr lang="en-US" sz="3600" dirty="0">
+                <a:latin typeface="Arial" pitchFamily="34" charset="0"/>
+                <a:cs typeface="Arial" pitchFamily="34" charset="0"/>
+              </a:rPr>
+              <a:t>Planned hospitals may already use other networks, narrowing the contrast.</a:t>
+            </a:r>
+          </a:p>
+          <a:p>
+            <a:pPr marL="457200" indent="-457200" defTabSz="3458871">
+              <a:spcBef>
+                <a:spcPct val="50000"/>
+              </a:spcBef>
               <a:buFont typeface="Arial" panose="020B0604020202020204" pitchFamily="34" charset="0"/>
               <a:buChar char="•"/>
             </a:pPr>
             <a:r>
-              <a:rPr lang="en-US" sz="3400" dirty="0"/>
+              <a:rPr lang="en-US" sz="3600" dirty="0">
+                <a:latin typeface="Arial" pitchFamily="34" charset="0"/>
+                <a:cs typeface="Arial" pitchFamily="34" charset="0"/>
+              </a:rPr>
               <a:t>Unmeasured hospital characteristics may confound estimates.</a:t>
             </a:r>
           </a:p>
           <a:p>
-            <a:pPr marL="457200" indent="-457200">
+            <a:pPr marL="457200" indent="-457200" defTabSz="3458871">
+              <a:spcBef>
+                <a:spcPct val="50000"/>
+              </a:spcBef>
               <a:buFont typeface="Arial" panose="020B0604020202020204" pitchFamily="34" charset="0"/>
               <a:buChar char="•"/>
             </a:pPr>
             <a:r>
-              <a:rPr lang="en-US" sz="3400" dirty="0"/>
-              <a:t>The CMS primary outcome window was not wholly post-TEFCA, and the secondary outcome window largely predated TEFCA implementation.</a:t>
-            </a:r>
-          </a:p>
-          <a:p>
-            <a:endParaRPr lang="en-US" sz="3400" b="1" dirty="0"/>
-          </a:p>
-          <a:p>
-            <a:r>
-              <a:rPr lang="en-US" sz="3400" b="1" dirty="0"/>
+              <a:rPr lang="en-US" sz="3600" dirty="0">
+                <a:latin typeface="Arial" pitchFamily="34" charset="0"/>
+                <a:cs typeface="Arial" pitchFamily="34" charset="0"/>
+              </a:rPr>
+              <a:t>The primary outcome window was not fully post-TEFCA; secondary windows largely predated implementation.</a:t>
+            </a:r>
+          </a:p>
+          <a:p>
+            <a:pPr defTabSz="3458871">
+              <a:spcBef>
+                <a:spcPct val="50000"/>
+              </a:spcBef>
+            </a:pPr>
+            <a:r>
+              <a:rPr lang="en-US" sz="3600" b="1" dirty="0">
+                <a:latin typeface="Arial" pitchFamily="34" charset="0"/>
+                <a:cs typeface="Arial" pitchFamily="34" charset="0"/>
+              </a:rPr>
               <a:t>Future work</a:t>
             </a:r>
             <a:r>
-              <a:rPr lang="en-US" sz="3400" dirty="0"/>
-              <a:t>. Longitudinal studies should evaluate sustained TEFCA use, actual exchange activity, and subsequent clinical outcomes.</a:t>
-            </a:r>
-            <a:endParaRPr lang="en-US" sz="3400" dirty="0">
-              <a:latin typeface="Arial" pitchFamily="34" charset="0"/>
-              <a:cs typeface="Arial" pitchFamily="34" charset="0"/>
-            </a:endParaRPr>
+              <a:rPr lang="en-US" sz="3600" dirty="0">
+                <a:latin typeface="Arial" pitchFamily="34" charset="0"/>
+                <a:cs typeface="Arial" pitchFamily="34" charset="0"/>
+              </a:rPr>
+              <a:t>. Longitudinal studies should evaluate sustained TEFCA use, actual exchange activity, and later clinical outcomes (e.g., difference-in-differences).</a:t>
+            </a:r>
           </a:p>
         </p:txBody>
       </p:sp>
@@ -5778,14 +5920,14 @@
           <p:nvPr>
             <p:extLst>
               <p:ext uri="{D42A27DB-BD31-4B8C-83A1-F6EECF244321}">
-                <p14:modId xmlns:p14="http://schemas.microsoft.com/office/powerpoint/2010/main" val="2769405288"/>
+                <p14:modId xmlns:p14="http://schemas.microsoft.com/office/powerpoint/2010/main" val="667498683"/>
               </p:ext>
             </p:extLst>
           </p:nvPr>
         </p:nvGraphicFramePr>
         <p:xfrm>
           <a:off x="1024128" y="16325379"/>
-          <a:ext cx="19549872" cy="6562348"/>
+          <a:ext cx="19549872" cy="6745228"/>
         </p:xfrm>
         <a:graphic>
           <a:graphicData uri="http://schemas.openxmlformats.org/drawingml/2006/table">
@@ -5794,28 +5936,28 @@
                 <a:tableStyleId>{08FB837D-C827-4EFA-A057-4D05807E0F7C}</a:tableStyleId>
               </a:tblPr>
               <a:tblGrid>
-                <a:gridCol w="8138533">
+                <a:gridCol w="8119872">
                   <a:extLst>
                     <a:ext uri="{9D8B030D-6E8A-4147-A177-3AD203B41FA5}">
                       <a16:colId xmlns:a16="http://schemas.microsoft.com/office/drawing/2014/main" val="2227418081"/>
                     </a:ext>
                   </a:extLst>
                 </a:gridCol>
-                <a:gridCol w="1636403">
+                <a:gridCol w="2286000">
                   <a:extLst>
                     <a:ext uri="{9D8B030D-6E8A-4147-A177-3AD203B41FA5}">
                       <a16:colId xmlns:a16="http://schemas.microsoft.com/office/drawing/2014/main" val="3713572183"/>
                     </a:ext>
                   </a:extLst>
                 </a:gridCol>
-                <a:gridCol w="4887468">
+                <a:gridCol w="5029200">
                   <a:extLst>
                     <a:ext uri="{9D8B030D-6E8A-4147-A177-3AD203B41FA5}">
                       <a16:colId xmlns:a16="http://schemas.microsoft.com/office/drawing/2014/main" val="883751037"/>
                     </a:ext>
                   </a:extLst>
                 </a:gridCol>
-                <a:gridCol w="4887468">
+                <a:gridCol w="4114800">
                   <a:extLst>
                     <a:ext uri="{9D8B030D-6E8A-4147-A177-3AD203B41FA5}">
                       <a16:colId xmlns:a16="http://schemas.microsoft.com/office/drawing/2014/main" val="3209527260"/>
@@ -5830,7 +5972,7 @@
                     <a:lstStyle/>
                     <a:p>
                       <a:r>
-                        <a:rPr lang="en-US" sz="3400" b="1" dirty="0"/>
+                        <a:rPr lang="en-US" sz="4000" b="1" dirty="0"/>
                         <a:t>Analysis: current vs planned TEFCA hospitals</a:t>
                       </a:r>
                     </a:p>
@@ -5874,7 +6016,7 @@
                     <a:p>
                       <a:pPr algn="r"/>
                       <a:r>
-                        <a:rPr lang="el-GR" sz="3400" b="1" dirty="0"/>
+                        <a:rPr lang="el-GR" sz="4000" b="1" dirty="0"/>
                         <a:t>β</a:t>
                       </a:r>
                     </a:p>
@@ -5918,7 +6060,7 @@
                     <a:p>
                       <a:pPr algn="r"/>
                       <a:r>
-                        <a:rPr lang="en-US" sz="3400" b="1" dirty="0"/>
+                        <a:rPr lang="en-US" sz="4000" b="1" dirty="0"/>
                         <a:t>95% CI</a:t>
                       </a:r>
                     </a:p>
@@ -5962,7 +6104,7 @@
                     <a:p>
                       <a:pPr algn="r"/>
                       <a:r>
-                        <a:rPr lang="en-US" sz="3400" b="1" dirty="0"/>
+                        <a:rPr lang="en-US" sz="3600" b="1" dirty="0"/>
                         <a:t>P-value</a:t>
                       </a:r>
                     </a:p>
@@ -6012,7 +6154,11 @@
                     <a:lstStyle/>
                     <a:p>
                       <a:r>
-                        <a:rPr lang="en-US" sz="3400" dirty="0"/>
+                        <a:rPr lang="en-US" sz="4000" dirty="0">
+                          <a:highlight>
+                            <a:srgbClr val="FFFF00"/>
+                          </a:highlight>
+                        </a:rPr>
                         <a:t>Primary Hybrid HWM model</a:t>
                       </a:r>
                     </a:p>
@@ -6036,7 +6182,11 @@
                     <a:p>
                       <a:pPr algn="r"/>
                       <a:r>
-                        <a:rPr lang="en-US" sz="3400" dirty="0"/>
+                        <a:rPr lang="en-US" sz="4000" dirty="0">
+                          <a:highlight>
+                            <a:srgbClr val="FFFF00"/>
+                          </a:highlight>
+                        </a:rPr>
                         <a:t>0.108</a:t>
                       </a:r>
                     </a:p>
@@ -6060,7 +6210,11 @@
                     <a:p>
                       <a:pPr algn="r"/>
                       <a:r>
-                        <a:rPr lang="en-US" sz="3400" dirty="0"/>
+                        <a:rPr lang="en-US" sz="4000" dirty="0">
+                          <a:highlight>
+                            <a:srgbClr val="FFFF00"/>
+                          </a:highlight>
+                        </a:rPr>
                         <a:t>0.001 to 0.216</a:t>
                       </a:r>
                     </a:p>
@@ -6084,7 +6238,11 @@
                     <a:p>
                       <a:pPr algn="r"/>
                       <a:r>
-                        <a:rPr lang="en-US" sz="3400" dirty="0"/>
+                        <a:rPr lang="en-US" sz="4000" dirty="0">
+                          <a:highlight>
+                            <a:srgbClr val="FFFF00"/>
+                          </a:highlight>
+                        </a:rPr>
                         <a:t>.047</a:t>
                       </a:r>
                     </a:p>
@@ -6114,7 +6272,11 @@
                     <a:lstStyle/>
                     <a:p>
                       <a:r>
-                        <a:rPr lang="en-US" sz="3400" dirty="0"/>
+                        <a:rPr lang="en-US" sz="4000" dirty="0">
+                          <a:highlight>
+                            <a:srgbClr val="FFFF00"/>
+                          </a:highlight>
+                        </a:rPr>
                         <a:t>Primary model, HC3 robust SEs</a:t>
                       </a:r>
                     </a:p>
@@ -6128,7 +6290,11 @@
                     <a:p>
                       <a:pPr algn="r"/>
                       <a:r>
-                        <a:rPr lang="en-US" sz="3400" dirty="0"/>
+                        <a:rPr lang="en-US" sz="4000" dirty="0">
+                          <a:highlight>
+                            <a:srgbClr val="FFFF00"/>
+                          </a:highlight>
+                        </a:rPr>
                         <a:t>0.108</a:t>
                       </a:r>
                     </a:p>
@@ -6142,7 +6308,11 @@
                     <a:p>
                       <a:pPr algn="r"/>
                       <a:r>
-                        <a:rPr lang="en-US" sz="3400" dirty="0"/>
+                        <a:rPr lang="en-US" sz="4000" dirty="0">
+                          <a:highlight>
+                            <a:srgbClr val="FFFF00"/>
+                          </a:highlight>
+                        </a:rPr>
                         <a:t>−0.010 to 0.227</a:t>
                       </a:r>
                     </a:p>
@@ -6156,7 +6326,11 @@
                     <a:p>
                       <a:pPr algn="r"/>
                       <a:r>
-                        <a:rPr lang="en-US" sz="3400" dirty="0"/>
+                        <a:rPr lang="en-US" sz="4000" dirty="0">
+                          <a:highlight>
+                            <a:srgbClr val="FFFF00"/>
+                          </a:highlight>
+                        </a:rPr>
                         <a:t>.072</a:t>
                       </a:r>
                     </a:p>
@@ -6176,7 +6350,7 @@
                     <a:lstStyle/>
                     <a:p>
                       <a:r>
-                        <a:rPr lang="en-US" sz="3400" dirty="0"/>
+                        <a:rPr lang="en-US" sz="4000" dirty="0"/>
                         <a:t>Heart failure mortality</a:t>
                       </a:r>
                     </a:p>
@@ -6190,7 +6364,7 @@
                     <a:p>
                       <a:pPr algn="r"/>
                       <a:r>
-                        <a:rPr lang="en-US" sz="3400" dirty="0"/>
+                        <a:rPr lang="en-US" sz="4000" dirty="0"/>
                         <a:t>−0.024</a:t>
                       </a:r>
                     </a:p>
@@ -6204,7 +6378,7 @@
                     <a:p>
                       <a:pPr algn="r"/>
                       <a:r>
-                        <a:rPr lang="en-US" sz="3400" dirty="0"/>
+                        <a:rPr lang="en-US" sz="4000" dirty="0"/>
                         <a:t>−0.545 to 0.497</a:t>
                       </a:r>
                     </a:p>
@@ -6218,7 +6392,7 @@
                     <a:p>
                       <a:pPr algn="r"/>
                       <a:r>
-                        <a:rPr lang="en-US" sz="3400" dirty="0"/>
+                        <a:rPr lang="en-US" sz="4000" dirty="0"/>
                         <a:t>.927</a:t>
                       </a:r>
                     </a:p>
@@ -6238,7 +6412,7 @@
                     <a:lstStyle/>
                     <a:p>
                       <a:r>
-                        <a:rPr lang="en-US" sz="3400" dirty="0"/>
+                        <a:rPr lang="en-US" sz="4000" dirty="0"/>
                         <a:t>Pneumonia mortality</a:t>
                       </a:r>
                     </a:p>
@@ -6252,7 +6426,7 @@
                     <a:p>
                       <a:pPr algn="r"/>
                       <a:r>
-                        <a:rPr lang="en-US" sz="3400" dirty="0"/>
+                        <a:rPr lang="en-US" sz="4000" dirty="0"/>
                         <a:t>0.479</a:t>
                       </a:r>
                     </a:p>
@@ -6266,7 +6440,7 @@
                     <a:p>
                       <a:pPr algn="r"/>
                       <a:r>
-                        <a:rPr lang="en-US" sz="3400" dirty="0"/>
+                        <a:rPr lang="en-US" sz="4000" dirty="0"/>
                         <a:t>−0.115 to 1.073</a:t>
                       </a:r>
                     </a:p>
@@ -6280,7 +6454,7 @@
                     <a:p>
                       <a:pPr algn="r"/>
                       <a:r>
-                        <a:rPr lang="en-US" sz="3400" dirty="0"/>
+                        <a:rPr lang="en-US" sz="4000" dirty="0"/>
                         <a:t>.114</a:t>
                       </a:r>
                     </a:p>
@@ -6311,8 +6485,8 @@
         </p:nvSpPr>
         <p:spPr>
           <a:xfrm>
-            <a:off x="365839" y="22962128"/>
-            <a:ext cx="21652415" cy="507831"/>
+            <a:off x="223625" y="23040358"/>
+            <a:ext cx="21260005" cy="584775"/>
           </a:xfrm>
           <a:prstGeom prst="rect">
             <a:avLst/>
@@ -6326,11 +6500,11 @@
           <a:lstStyle/>
           <a:p>
             <a:r>
-              <a:rPr lang="en-US" sz="2700" i="1" dirty="0"/>
+              <a:rPr lang="en-US" sz="3200" i="1" dirty="0"/>
               <a:t>Note. </a:t>
             </a:r>
             <a:r>
-              <a:rPr lang="en-US" sz="2700" dirty="0"/>
+              <a:rPr lang="en-US" sz="3200" dirty="0"/>
               <a:t>Positive coefficients indicate higher mortality values; planned TEFCA participation was the reference category.</a:t>
             </a:r>
           </a:p>
@@ -6350,8 +6524,8 @@
         </p:nvSpPr>
         <p:spPr>
           <a:xfrm>
-            <a:off x="1257300" y="12631666"/>
-            <a:ext cx="11201400" cy="584775"/>
+            <a:off x="1895441" y="13179034"/>
+            <a:ext cx="10226702" cy="553998"/>
           </a:xfrm>
           <a:prstGeom prst="rect">
             <a:avLst/>
@@ -6375,7 +6549,7 @@
           <a:lstStyle/>
           <a:p>
             <a:r>
-              <a:rPr lang="en-US" sz="3200" b="1" dirty="0"/>
+              <a:rPr lang="en-US" sz="3000" b="1" dirty="0"/>
               <a:t>TEFCA: Common Framework for Nationwide Exchange</a:t>
             </a:r>
           </a:p>
@@ -6395,8 +6569,8 @@
         </p:nvSpPr>
         <p:spPr>
           <a:xfrm>
-            <a:off x="2272008" y="23721812"/>
-            <a:ext cx="9921240" cy="523220"/>
+            <a:off x="2286000" y="23493923"/>
+            <a:ext cx="13716000" cy="646331"/>
           </a:xfrm>
           <a:prstGeom prst="rect">
             <a:avLst/>
@@ -6410,12 +6584,8 @@
           <a:lstStyle/>
           <a:p>
             <a:r>
-              <a:rPr lang="en-US" sz="2700" b="1" dirty="0"/>
-              <a:t>Figure 2. </a:t>
-            </a:r>
-            <a:r>
-              <a:rPr lang="en-US" sz="2700" dirty="0"/>
-              <a:t>Adjusted associations with Hybrid HWM</a:t>
+              <a:rPr lang="en-US" sz="3600" b="1" dirty="0"/>
+              <a:t>Figure 2. Adjusted associations with Hybrid HWM</a:t>
             </a:r>
           </a:p>
         </p:txBody>
@@ -6434,8 +6604,8 @@
         </p:nvSpPr>
         <p:spPr bwMode="auto">
           <a:xfrm>
-            <a:off x="3230227" y="13391867"/>
-            <a:ext cx="1589352" cy="623678"/>
+            <a:off x="4003680" y="13763853"/>
+            <a:ext cx="1396864" cy="447102"/>
           </a:xfrm>
           <a:prstGeom prst="rect">
             <a:avLst/>
@@ -6479,7 +6649,7 @@
               <a:tabLst/>
             </a:pPr>
             <a:r>
-              <a:rPr kumimoji="0" lang="en-US" sz="3200" b="0" i="0" u="none" strike="noStrike" cap="none" normalizeH="0" baseline="0" dirty="0">
+              <a:rPr kumimoji="0" lang="en-US" sz="2800" b="0" i="0" u="none" strike="noStrike" cap="none" normalizeH="0" baseline="0" dirty="0">
                 <a:ln>
                   <a:noFill/>
                 </a:ln>
@@ -6510,7 +6680,7 @@
         </p:nvCxnSpPr>
         <p:spPr bwMode="auto">
           <a:xfrm>
-            <a:off x="5146021" y="13700864"/>
+            <a:off x="5486400" y="13979763"/>
             <a:ext cx="685800" cy="0"/>
           </a:xfrm>
           <a:prstGeom prst="straightConnector1">
@@ -6550,8 +6720,8 @@
         </p:nvSpPr>
         <p:spPr bwMode="auto">
           <a:xfrm>
-            <a:off x="6043389" y="13405619"/>
-            <a:ext cx="1717621" cy="623677"/>
+            <a:off x="6367546" y="13774392"/>
+            <a:ext cx="1396864" cy="436563"/>
           </a:xfrm>
           <a:prstGeom prst="rect">
             <a:avLst/>
@@ -6598,7 +6768,7 @@
               <a:tabLst/>
             </a:pPr>
             <a:r>
-              <a:rPr kumimoji="0" lang="en-US" sz="3200" b="0" i="0" u="none" strike="noStrike" cap="none" normalizeH="0" baseline="0" dirty="0">
+              <a:rPr kumimoji="0" lang="en-US" sz="2800" b="0" i="0" u="none" strike="noStrike" cap="none" normalizeH="0" baseline="0" dirty="0">
                 <a:ln>
                   <a:noFill/>
                 </a:ln>
@@ -6627,8 +6797,8 @@
         </p:nvSpPr>
         <p:spPr bwMode="auto">
           <a:xfrm>
-            <a:off x="9110156" y="13381313"/>
-            <a:ext cx="1717621" cy="600784"/>
+            <a:off x="8794628" y="13774392"/>
+            <a:ext cx="1413452" cy="436563"/>
           </a:xfrm>
           <a:prstGeom prst="rect">
             <a:avLst/>
@@ -6672,7 +6842,7 @@
               <a:tabLst/>
             </a:pPr>
             <a:r>
-              <a:rPr kumimoji="0" lang="en-US" sz="3200" b="0" i="0" u="none" strike="noStrike" cap="none" normalizeH="0" baseline="0" dirty="0">
+              <a:rPr kumimoji="0" lang="en-US" sz="2800" b="0" i="0" u="none" strike="noStrike" cap="none" normalizeH="0" baseline="0" dirty="0">
                 <a:ln>
                   <a:noFill/>
                 </a:ln>
@@ -6703,8 +6873,8 @@
         </p:nvCxnSpPr>
         <p:spPr bwMode="auto">
           <a:xfrm>
-            <a:off x="8092155" y="13705738"/>
-            <a:ext cx="801011" cy="0"/>
+            <a:off x="8014931" y="13979763"/>
+            <a:ext cx="667299" cy="20107"/>
           </a:xfrm>
           <a:prstGeom prst="straightConnector1">
             <a:avLst/>
@@ -6743,8 +6913,8 @@
         </p:nvSpPr>
         <p:spPr>
           <a:xfrm>
-            <a:off x="329374" y="14195989"/>
-            <a:ext cx="13322618" cy="584775"/>
+            <a:off x="834712" y="14262225"/>
+            <a:ext cx="12503775" cy="553998"/>
           </a:xfrm>
           <a:prstGeom prst="rect">
             <a:avLst/>
@@ -6760,8 +6930,8 @@
           <a:lstStyle/>
           <a:p>
             <a:r>
-              <a:rPr lang="en-US" sz="3200" b="1" dirty="0"/>
-              <a:t>Hospitals, HIOs, and EHR/vendor networks connect through QHINs</a:t>
+              <a:rPr lang="en-US" sz="3000" b="1" dirty="0"/>
+              <a:t>Hospitals, HIOs, and EHR vendor networks connect through QHINs</a:t>
             </a:r>
           </a:p>
         </p:txBody>
@@ -6781,7 +6951,7 @@
         <p:spPr>
           <a:xfrm>
             <a:off x="1895441" y="15727758"/>
-            <a:ext cx="21945600" cy="523220"/>
+            <a:ext cx="19290018" cy="646331"/>
           </a:xfrm>
           <a:prstGeom prst="rect">
             <a:avLst/>
@@ -6795,12 +6965,8 @@
           <a:lstStyle/>
           <a:p>
             <a:r>
-              <a:rPr lang="en-US" sz="2700" b="1" dirty="0"/>
-              <a:t>Table 1. </a:t>
-            </a:r>
-            <a:r>
-              <a:rPr lang="en-US" sz="2700" dirty="0"/>
-              <a:t>TEFCA Participation Estimates Across Mortality Analyses</a:t>
+              <a:rPr lang="en-US" sz="3600" b="1" dirty="0"/>
+              <a:t>Table 1. TEFCA Participation Estimates Across Mortality Analyses</a:t>
             </a:r>
           </a:p>
         </p:txBody>
@@ -6819,8 +6985,8 @@
         </p:nvSpPr>
         <p:spPr>
           <a:xfrm>
-            <a:off x="36845849" y="6083718"/>
-            <a:ext cx="6240678" cy="7417415"/>
+            <a:off x="36410068" y="5970427"/>
+            <a:ext cx="6749612" cy="6894195"/>
           </a:xfrm>
           <a:prstGeom prst="rect">
             <a:avLst/>
@@ -6839,7 +7005,7 @@
             </a:r>
             <a:r>
               <a:rPr lang="en-US" sz="3400" dirty="0"/>
-              <a:t>. With HC3 robust standard errors, the confidence interval included zero (95% CI, −0.010–0.227; </a:t>
+              <a:t>. With HC3 robust standard errors, the 95% confidence interval included zero (-0.010 to 0.227; </a:t>
             </a:r>
             <a:r>
               <a:rPr lang="en-US" sz="3400" i="1" dirty="0"/>
@@ -6847,7 +7013,7 @@
             </a:r>
             <a:r>
               <a:rPr lang="en-US" sz="3400" dirty="0"/>
-              <a:t> = .072). Current-versus-planned estimates were also not significant for heart failure (</a:t>
+              <a:t> = .072). Current-versus-planned estimates also not significant for heart failure (</a:t>
             </a:r>
             <a:r>
               <a:rPr lang="el-GR" sz="3400" dirty="0"/>
@@ -6871,7 +7037,7 @@
             </a:r>
             <a:r>
               <a:rPr lang="en-US" sz="3400" dirty="0"/>
-              <a:t> = .114). EHR vendor-network participation and larger CMS denominators were associated with lower Hybrid HWM scores.</a:t>
+              <a:t> = .114). Participation in EHR vendor networks and larger CMS denominators associated with lower Hybrid HWM scores.</a:t>
             </a:r>
           </a:p>
         </p:txBody>
@@ -6890,14 +7056,14 @@
         </p:nvSpPr>
         <p:spPr>
           <a:xfrm>
-            <a:off x="29632703" y="13469455"/>
-            <a:ext cx="13453824" cy="1338828"/>
+            <a:off x="29308416" y="13290632"/>
+            <a:ext cx="13790811" cy="1477328"/>
           </a:xfrm>
           <a:prstGeom prst="rect">
             <a:avLst/>
           </a:prstGeom>
           <a:solidFill>
-            <a:srgbClr val="E7F4F5"/>
+            <a:srgbClr val="79DCFF"/>
           </a:solidFill>
         </p:spPr>
         <p:txBody>
@@ -6907,8 +7073,12 @@
           <a:lstStyle/>
           <a:p>
             <a:r>
-              <a:rPr lang="en-US" sz="2700" b="1" dirty="0"/>
-              <a:t>Key finding: The analyses did not provide robust evidence that early current TEFCA participation was associated with lower hospital mortality than planned participation.</a:t>
+              <a:rPr lang="en-US" sz="3000" b="1" dirty="0"/>
+              <a:t>Key finding: </a:t>
+            </a:r>
+            <a:r>
+              <a:rPr lang="en-US" sz="3000" dirty="0"/>
+              <a:t>The analyses did not provide robust evidence that early current TEFCA participation was associated with lower hospital mortality than planned participation.</a:t>
             </a:r>
           </a:p>
         </p:txBody>
@@ -6927,8 +7097,8 @@
         </p:nvSpPr>
         <p:spPr>
           <a:xfrm>
-            <a:off x="520017" y="31893924"/>
-            <a:ext cx="20711159" cy="923330"/>
+            <a:off x="263988" y="31752547"/>
+            <a:ext cx="20711159" cy="1077218"/>
           </a:xfrm>
           <a:prstGeom prst="rect">
             <a:avLst/>
@@ -6942,11 +7112,11 @@
           <a:lstStyle/>
           <a:p>
             <a:r>
-              <a:rPr lang="en-US" sz="2700" i="1" dirty="0"/>
+              <a:rPr lang="en-US" sz="3200" i="1" dirty="0"/>
               <a:t>Note. </a:t>
             </a:r>
             <a:r>
-              <a:rPr lang="en-US" sz="2700" dirty="0"/>
+              <a:rPr lang="en-US" sz="3200" dirty="0"/>
               <a:t>Points represent adjusted OLS coefficients; error bars represent 95% confidence intervals. Planned TEFCA participation was the reference category.</a:t>
             </a:r>
           </a:p>
@@ -7016,7 +7186,7 @@
         </p:blipFill>
         <p:spPr>
           <a:xfrm>
-            <a:off x="36985643" y="2702148"/>
+            <a:off x="37189762" y="2605166"/>
             <a:ext cx="1927156" cy="1927156"/>
           </a:xfrm>
           <a:prstGeom prst="rect">
@@ -7038,8 +7208,8 @@
         </p:nvSpPr>
         <p:spPr>
           <a:xfrm>
-            <a:off x="34269236" y="4629631"/>
-            <a:ext cx="5429571" cy="507831"/>
+            <a:off x="34518601" y="4499800"/>
+            <a:ext cx="4800600" cy="507831"/>
           </a:xfrm>
           <a:prstGeom prst="rect">
             <a:avLst/>
@@ -7091,7 +7261,7 @@
         </p:blipFill>
         <p:spPr>
           <a:xfrm>
-            <a:off x="15354520" y="6117946"/>
+            <a:off x="15446851" y="5904719"/>
             <a:ext cx="11810558" cy="4785021"/>
           </a:xfrm>
           <a:prstGeom prst="rect">
@@ -7179,8 +7349,8 @@
         </p:nvSpPr>
         <p:spPr bwMode="auto">
           <a:xfrm>
-            <a:off x="33147000" y="23317200"/>
-            <a:ext cx="9992466" cy="3970318"/>
+            <a:off x="33189333" y="23351862"/>
+            <a:ext cx="9908119" cy="3970318"/>
           </a:xfrm>
           <a:prstGeom prst="rect">
             <a:avLst/>
@@ -7410,33 +7580,7 @@
                 <a:effectLst/>
                 <a:latin typeface="Arial" panose="020B0604020202020204" pitchFamily="34" charset="0"/>
               </a:rPr>
-              <a:t>Health </a:t>
-            </a:r>
-            <a:r>
-              <a:rPr kumimoji="0" lang="en-US" altLang="en-US" sz="1800" b="1" i="1" u="none" strike="noStrike" cap="none" normalizeH="0" baseline="0" dirty="0" err="1">
-                <a:ln>
-                  <a:noFill/>
-                </a:ln>
-                <a:solidFill>
-                  <a:schemeClr val="tx1"/>
-                </a:solidFill>
-                <a:effectLst/>
-                <a:latin typeface="Arial" panose="020B0604020202020204" pitchFamily="34" charset="0"/>
-              </a:rPr>
-              <a:t>Aff</a:t>
-            </a:r>
-            <a:r>
-              <a:rPr kumimoji="0" lang="en-US" altLang="en-US" sz="1800" b="1" i="1" u="none" strike="noStrike" cap="none" normalizeH="0" baseline="0" dirty="0">
-                <a:ln>
-                  <a:noFill/>
-                </a:ln>
-                <a:solidFill>
-                  <a:schemeClr val="tx1"/>
-                </a:solidFill>
-                <a:effectLst/>
-                <a:latin typeface="Arial" panose="020B0604020202020204" pitchFamily="34" charset="0"/>
-              </a:rPr>
-              <a:t> Sch.</a:t>
+              <a:t>Health Aff Sch.</a:t>
             </a:r>
             <a:r>
               <a:rPr kumimoji="0" lang="en-US" altLang="en-US" sz="1800" b="1" i="0" u="none" strike="noStrike" cap="none" normalizeH="0" baseline="0" dirty="0">
@@ -7470,19 +7614,6 @@
               <a:tabLst/>
             </a:pPr>
             <a:r>
-              <a:rPr kumimoji="0" lang="en-US" altLang="en-US" sz="1800" b="1" i="0" u="none" strike="noStrike" cap="none" normalizeH="0" baseline="0" dirty="0" err="1">
-                <a:ln>
-                  <a:noFill/>
-                </a:ln>
-                <a:solidFill>
-                  <a:schemeClr val="tx1"/>
-                </a:solidFill>
-                <a:effectLst/>
-                <a:latin typeface="Arial" panose="020B0604020202020204" pitchFamily="34" charset="0"/>
-              </a:rPr>
-              <a:t>Frisse</a:t>
-            </a:r>
-            <a:r>
               <a:rPr kumimoji="0" lang="en-US" altLang="en-US" sz="1800" b="1" i="0" u="none" strike="noStrike" cap="none" normalizeH="0" baseline="0" dirty="0">
                 <a:ln>
                   <a:noFill/>
@@ -7493,7 +7624,7 @@
                 <a:effectLst/>
                 <a:latin typeface="Arial" panose="020B0604020202020204" pitchFamily="34" charset="0"/>
               </a:rPr>
-              <a:t> ME, et al. </a:t>
+              <a:t>Frisse ME, et al. </a:t>
             </a:r>
             <a:r>
               <a:rPr kumimoji="0" lang="en-US" altLang="en-US" sz="1800" b="1" i="1" u="none" strike="noStrike" cap="none" normalizeH="0" baseline="0" dirty="0">
@@ -7607,33 +7738,7 @@
                 <a:effectLst/>
                 <a:latin typeface="Arial" panose="020B0604020202020204" pitchFamily="34" charset="0"/>
               </a:rPr>
-              <a:t>Hincapie A, </a:t>
-            </a:r>
-            <a:r>
-              <a:rPr kumimoji="0" lang="en-US" altLang="en-US" sz="1800" b="1" i="0" u="none" strike="noStrike" cap="none" normalizeH="0" baseline="0" dirty="0" err="1">
-                <a:ln>
-                  <a:noFill/>
-                </a:ln>
-                <a:solidFill>
-                  <a:schemeClr val="tx1"/>
-                </a:solidFill>
-                <a:effectLst/>
-                <a:latin typeface="Arial" panose="020B0604020202020204" pitchFamily="34" charset="0"/>
-              </a:rPr>
-              <a:t>Warholak</a:t>
-            </a:r>
-            <a:r>
-              <a:rPr kumimoji="0" lang="en-US" altLang="en-US" sz="1800" b="1" i="0" u="none" strike="noStrike" cap="none" normalizeH="0" baseline="0" dirty="0">
-                <a:ln>
-                  <a:noFill/>
-                </a:ln>
-                <a:solidFill>
-                  <a:schemeClr val="tx1"/>
-                </a:solidFill>
-                <a:effectLst/>
-                <a:latin typeface="Arial" panose="020B0604020202020204" pitchFamily="34" charset="0"/>
-              </a:rPr>
-              <a:t> T. </a:t>
+              <a:t>Hincapie A, Warholak T. </a:t>
             </a:r>
             <a:r>
               <a:rPr kumimoji="0" lang="en-US" altLang="en-US" sz="1800" b="1" i="1" u="none" strike="noStrike" cap="none" normalizeH="0" baseline="0" dirty="0">
@@ -7680,19 +7785,6 @@
               <a:tabLst/>
             </a:pPr>
             <a:r>
-              <a:rPr kumimoji="0" lang="en-US" altLang="en-US" sz="1800" b="1" i="0" u="none" strike="noStrike" cap="none" normalizeH="0" baseline="0" dirty="0" err="1">
-                <a:ln>
-                  <a:noFill/>
-                </a:ln>
-                <a:solidFill>
-                  <a:schemeClr val="tx1"/>
-                </a:solidFill>
-                <a:effectLst/>
-                <a:latin typeface="Arial" panose="020B0604020202020204" pitchFamily="34" charset="0"/>
-              </a:rPr>
-              <a:t>Janakiraman</a:t>
-            </a:r>
-            <a:r>
               <a:rPr kumimoji="0" lang="en-US" altLang="en-US" sz="1800" b="1" i="0" u="none" strike="noStrike" cap="none" normalizeH="0" baseline="0" dirty="0">
                 <a:ln>
                   <a:noFill/>
@@ -7703,7 +7795,7 @@
                 <a:effectLst/>
                 <a:latin typeface="Arial" panose="020B0604020202020204" pitchFamily="34" charset="0"/>
               </a:rPr>
-              <a:t> R, et al. </a:t>
+              <a:t>Janakiraman R, et al. </a:t>
             </a:r>
             <a:r>
               <a:rPr kumimoji="0" lang="en-US" altLang="en-US" sz="1800" b="1" i="1" u="none" strike="noStrike" cap="none" normalizeH="0" baseline="0" dirty="0">
@@ -7773,85 +7865,7 @@
                 <a:effectLst/>
                 <a:latin typeface="Arial" panose="020B0604020202020204" pitchFamily="34" charset="0"/>
               </a:rPr>
-              <a:t>J Korean </a:t>
-            </a:r>
-            <a:r>
-              <a:rPr kumimoji="0" lang="en-US" altLang="en-US" sz="1800" b="1" i="1" u="none" strike="noStrike" cap="none" normalizeH="0" baseline="0" dirty="0" err="1">
-                <a:ln>
-                  <a:noFill/>
-                </a:ln>
-                <a:solidFill>
-                  <a:schemeClr val="tx1"/>
-                </a:solidFill>
-                <a:effectLst/>
-                <a:latin typeface="Arial" panose="020B0604020202020204" pitchFamily="34" charset="0"/>
-              </a:rPr>
-              <a:t>Acad</a:t>
-            </a:r>
-            <a:r>
-              <a:rPr kumimoji="0" lang="en-US" altLang="en-US" sz="1800" b="1" i="1" u="none" strike="noStrike" cap="none" normalizeH="0" baseline="0" dirty="0">
-                <a:ln>
-                  <a:noFill/>
-                </a:ln>
-                <a:solidFill>
-                  <a:schemeClr val="tx1"/>
-                </a:solidFill>
-                <a:effectLst/>
-                <a:latin typeface="Arial" panose="020B0604020202020204" pitchFamily="34" charset="0"/>
-              </a:rPr>
-              <a:t> </a:t>
-            </a:r>
-            <a:r>
-              <a:rPr kumimoji="0" lang="en-US" altLang="en-US" sz="1800" b="1" i="1" u="none" strike="noStrike" cap="none" normalizeH="0" baseline="0" dirty="0" err="1">
-                <a:ln>
-                  <a:noFill/>
-                </a:ln>
-                <a:solidFill>
-                  <a:schemeClr val="tx1"/>
-                </a:solidFill>
-                <a:effectLst/>
-                <a:latin typeface="Arial" panose="020B0604020202020204" pitchFamily="34" charset="0"/>
-              </a:rPr>
-              <a:t>Fundam</a:t>
-            </a:r>
-            <a:r>
-              <a:rPr kumimoji="0" lang="en-US" altLang="en-US" sz="1800" b="1" i="1" u="none" strike="noStrike" cap="none" normalizeH="0" baseline="0" dirty="0">
-                <a:ln>
-                  <a:noFill/>
-                </a:ln>
-                <a:solidFill>
-                  <a:schemeClr val="tx1"/>
-                </a:solidFill>
-                <a:effectLst/>
-                <a:latin typeface="Arial" panose="020B0604020202020204" pitchFamily="34" charset="0"/>
-              </a:rPr>
-              <a:t> </a:t>
-            </a:r>
-            <a:r>
-              <a:rPr kumimoji="0" lang="en-US" altLang="en-US" sz="1800" b="1" i="1" u="none" strike="noStrike" cap="none" normalizeH="0" baseline="0" dirty="0" err="1">
-                <a:ln>
-                  <a:noFill/>
-                </a:ln>
-                <a:solidFill>
-                  <a:schemeClr val="tx1"/>
-                </a:solidFill>
-                <a:effectLst/>
-                <a:latin typeface="Arial" panose="020B0604020202020204" pitchFamily="34" charset="0"/>
-              </a:rPr>
-              <a:t>Nurs</a:t>
-            </a:r>
-            <a:r>
-              <a:rPr kumimoji="0" lang="en-US" altLang="en-US" sz="1800" b="1" i="1" u="none" strike="noStrike" cap="none" normalizeH="0" baseline="0" dirty="0">
-                <a:ln>
-                  <a:noFill/>
-                </a:ln>
-                <a:solidFill>
-                  <a:schemeClr val="tx1"/>
-                </a:solidFill>
-                <a:effectLst/>
-                <a:latin typeface="Arial" panose="020B0604020202020204" pitchFamily="34" charset="0"/>
-              </a:rPr>
-              <a:t>.</a:t>
+              <a:t>J Korean Acad Fundam Nurs.</a:t>
             </a:r>
             <a:r>
               <a:rPr kumimoji="0" lang="en-US" altLang="en-US" sz="1800" b="1" i="0" u="none" strike="noStrike" cap="none" normalizeH="0" baseline="0" dirty="0">
@@ -7885,19 +7899,6 @@
               <a:tabLst/>
             </a:pPr>
             <a:r>
-              <a:rPr kumimoji="0" lang="en-US" altLang="en-US" sz="1800" b="1" i="0" u="none" strike="noStrike" cap="none" normalizeH="0" baseline="0" dirty="0" err="1">
-                <a:ln>
-                  <a:noFill/>
-                </a:ln>
-                <a:solidFill>
-                  <a:schemeClr val="tx1"/>
-                </a:solidFill>
-                <a:effectLst/>
-                <a:latin typeface="Arial" panose="020B0604020202020204" pitchFamily="34" charset="0"/>
-              </a:rPr>
-              <a:t>Menachemi</a:t>
-            </a:r>
-            <a:r>
               <a:rPr kumimoji="0" lang="en-US" altLang="en-US" sz="1800" b="1" i="0" u="none" strike="noStrike" cap="none" normalizeH="0" baseline="0" dirty="0">
                 <a:ln>
                   <a:noFill/>
@@ -7908,7 +7909,7 @@
                 <a:effectLst/>
                 <a:latin typeface="Arial" panose="020B0604020202020204" pitchFamily="34" charset="0"/>
               </a:rPr>
-              <a:t> N, et al. </a:t>
+              <a:t>Menachemi N, et al. </a:t>
             </a:r>
             <a:r>
               <a:rPr kumimoji="0" lang="en-US" altLang="en-US" sz="1800" b="1" i="1" u="none" strike="noStrike" cap="none" normalizeH="0" baseline="0" dirty="0">
@@ -7955,19 +7956,6 @@
               <a:tabLst/>
             </a:pPr>
             <a:r>
-              <a:rPr kumimoji="0" lang="en-US" altLang="en-US" sz="1800" b="1" i="0" u="none" strike="noStrike" cap="none" normalizeH="0" baseline="0" dirty="0" err="1">
-                <a:ln>
-                  <a:noFill/>
-                </a:ln>
-                <a:solidFill>
-                  <a:schemeClr val="tx1"/>
-                </a:solidFill>
-                <a:effectLst/>
-                <a:latin typeface="Arial" panose="020B0604020202020204" pitchFamily="34" charset="0"/>
-              </a:rPr>
-              <a:t>Sadoughi</a:t>
-            </a:r>
-            <a:r>
               <a:rPr kumimoji="0" lang="en-US" altLang="en-US" sz="1800" b="1" i="0" u="none" strike="noStrike" cap="none" normalizeH="0" baseline="0" dirty="0">
                 <a:ln>
                   <a:noFill/>
@@ -7978,20 +7966,7 @@
                 <a:effectLst/>
                 <a:latin typeface="Arial" panose="020B0604020202020204" pitchFamily="34" charset="0"/>
               </a:rPr>
-              <a:t> F, et al. </a:t>
-            </a:r>
-            <a:r>
-              <a:rPr kumimoji="0" lang="en-US" altLang="en-US" sz="1800" b="1" i="1" u="none" strike="noStrike" cap="none" normalizeH="0" baseline="0" dirty="0" err="1">
-                <a:ln>
-                  <a:noFill/>
-                </a:ln>
-                <a:solidFill>
-                  <a:schemeClr val="tx1"/>
-                </a:solidFill>
-                <a:effectLst/>
-                <a:latin typeface="Arial" panose="020B0604020202020204" pitchFamily="34" charset="0"/>
-              </a:rPr>
-              <a:t>Comput</a:t>
+              <a:t>Sadoughi F, et al. </a:t>
             </a:r>
             <a:r>
               <a:rPr kumimoji="0" lang="en-US" altLang="en-US" sz="1800" b="1" i="1" u="none" strike="noStrike" cap="none" normalizeH="0" baseline="0" dirty="0">
@@ -8004,7 +7979,7 @@
                 <a:effectLst/>
                 <a:latin typeface="Arial" panose="020B0604020202020204" pitchFamily="34" charset="0"/>
               </a:rPr>
-              <a:t> Methods Programs Biomed.</a:t>
+              <a:t>Comput Methods Programs Biomed.</a:t>
             </a:r>
             <a:r>
               <a:rPr kumimoji="0" lang="en-US" altLang="en-US" sz="1800" b="1" i="0" u="none" strike="noStrike" cap="none" normalizeH="0" baseline="0" dirty="0">
@@ -8038,19 +8013,6 @@
               <a:tabLst/>
             </a:pPr>
             <a:r>
-              <a:rPr kumimoji="0" lang="en-US" altLang="en-US" sz="1800" b="1" i="0" u="none" strike="noStrike" cap="none" normalizeH="0" baseline="0" dirty="0" err="1">
-                <a:ln>
-                  <a:noFill/>
-                </a:ln>
-                <a:solidFill>
-                  <a:schemeClr val="tx1"/>
-                </a:solidFill>
-                <a:effectLst/>
-                <a:latin typeface="Arial" panose="020B0604020202020204" pitchFamily="34" charset="0"/>
-              </a:rPr>
-              <a:t>Turbow</a:t>
-            </a:r>
-            <a:r>
               <a:rPr kumimoji="0" lang="en-US" altLang="en-US" sz="1800" b="1" i="0" u="none" strike="noStrike" cap="none" normalizeH="0" baseline="0" dirty="0">
                 <a:ln>
                   <a:noFill/>
@@ -8061,7 +8023,7 @@
                 <a:effectLst/>
                 <a:latin typeface="Arial" panose="020B0604020202020204" pitchFamily="34" charset="0"/>
               </a:rPr>
-              <a:t> S, et al. </a:t>
+              <a:t>Turbow S, et al. </a:t>
             </a:r>
             <a:r>
               <a:rPr kumimoji="0" lang="en-US" altLang="en-US" sz="1800" b="1" i="1" u="none" strike="noStrike" cap="none" normalizeH="0" baseline="0" dirty="0">

--- a/poster/BMI6313_TEFCA_Poster_Jordan_Pulaski.pptx
+++ b/poster/BMI6313_TEFCA_Poster_Jordan_Pulaski.pptx
@@ -236,12 +236,12 @@
   <pc:docChgLst>
     <pc:chgData name="Pulaski, Jordan A" userId="b59e5678-eb70-4bba-8605-0c3b286199fc" providerId="ADAL" clId="{ECF8852F-3FCF-4736-A5DC-07A8B6B99125}"/>
     <pc:docChg chg="undo redo custSel modSld">
-      <pc:chgData name="Pulaski, Jordan A" userId="b59e5678-eb70-4bba-8605-0c3b286199fc" providerId="ADAL" clId="{ECF8852F-3FCF-4736-A5DC-07A8B6B99125}" dt="2026-08-07T02:30:58.933" v="1257" actId="14100"/>
+      <pc:chgData name="Pulaski, Jordan A" userId="b59e5678-eb70-4bba-8605-0c3b286199fc" providerId="ADAL" clId="{ECF8852F-3FCF-4736-A5DC-07A8B6B99125}" dt="2026-08-07T08:55:23.097" v="1436" actId="20577"/>
       <pc:docMkLst>
         <pc:docMk/>
       </pc:docMkLst>
       <pc:sldChg chg="addSp delSp modSp mod">
-        <pc:chgData name="Pulaski, Jordan A" userId="b59e5678-eb70-4bba-8605-0c3b286199fc" providerId="ADAL" clId="{ECF8852F-3FCF-4736-A5DC-07A8B6B99125}" dt="2026-08-07T02:30:58.933" v="1257" actId="14100"/>
+        <pc:chgData name="Pulaski, Jordan A" userId="b59e5678-eb70-4bba-8605-0c3b286199fc" providerId="ADAL" clId="{ECF8852F-3FCF-4736-A5DC-07A8B6B99125}" dt="2026-08-07T08:55:23.097" v="1436" actId="20577"/>
         <pc:sldMkLst>
           <pc:docMk/>
           <pc:sldMk cId="0" sldId="256"/>
@@ -279,7 +279,7 @@
           </ac:spMkLst>
         </pc:spChg>
         <pc:spChg chg="mod">
-          <ac:chgData name="Pulaski, Jordan A" userId="b59e5678-eb70-4bba-8605-0c3b286199fc" providerId="ADAL" clId="{ECF8852F-3FCF-4736-A5DC-07A8B6B99125}" dt="2026-08-06T21:19:23.727" v="1171" actId="14100"/>
+          <ac:chgData name="Pulaski, Jordan A" userId="b59e5678-eb70-4bba-8605-0c3b286199fc" providerId="ADAL" clId="{ECF8852F-3FCF-4736-A5DC-07A8B6B99125}" dt="2026-08-07T08:52:38.810" v="1369" actId="20577"/>
           <ac:spMkLst>
             <pc:docMk/>
             <pc:sldMk cId="0" sldId="256"/>
@@ -295,7 +295,7 @@
           </ac:spMkLst>
         </pc:spChg>
         <pc:spChg chg="mod">
-          <ac:chgData name="Pulaski, Jordan A" userId="b59e5678-eb70-4bba-8605-0c3b286199fc" providerId="ADAL" clId="{ECF8852F-3FCF-4736-A5DC-07A8B6B99125}" dt="2026-08-06T20:25:00.223" v="1084" actId="1076"/>
+          <ac:chgData name="Pulaski, Jordan A" userId="b59e5678-eb70-4bba-8605-0c3b286199fc" providerId="ADAL" clId="{ECF8852F-3FCF-4736-A5DC-07A8B6B99125}" dt="2026-08-07T08:54:24.793" v="1423" actId="14100"/>
           <ac:spMkLst>
             <pc:docMk/>
             <pc:sldMk cId="0" sldId="256"/>
@@ -319,7 +319,7 @@
           </ac:spMkLst>
         </pc:spChg>
         <pc:spChg chg="mod">
-          <ac:chgData name="Pulaski, Jordan A" userId="b59e5678-eb70-4bba-8605-0c3b286199fc" providerId="ADAL" clId="{ECF8852F-3FCF-4736-A5DC-07A8B6B99125}" dt="2026-08-06T20:30:36.285" v="1137" actId="1076"/>
+          <ac:chgData name="Pulaski, Jordan A" userId="b59e5678-eb70-4bba-8605-0c3b286199fc" providerId="ADAL" clId="{ECF8852F-3FCF-4736-A5DC-07A8B6B99125}" dt="2026-08-07T08:54:33.076" v="1424" actId="1076"/>
           <ac:spMkLst>
             <pc:docMk/>
             <pc:sldMk cId="0" sldId="256"/>
@@ -327,7 +327,7 @@
           </ac:spMkLst>
         </pc:spChg>
         <pc:spChg chg="mod">
-          <ac:chgData name="Pulaski, Jordan A" userId="b59e5678-eb70-4bba-8605-0c3b286199fc" providerId="ADAL" clId="{ECF8852F-3FCF-4736-A5DC-07A8B6B99125}" dt="2026-08-06T21:19:39.755" v="1181" actId="12"/>
+          <ac:chgData name="Pulaski, Jordan A" userId="b59e5678-eb70-4bba-8605-0c3b286199fc" providerId="ADAL" clId="{ECF8852F-3FCF-4736-A5DC-07A8B6B99125}" dt="2026-08-07T08:55:11.708" v="1428"/>
           <ac:spMkLst>
             <pc:docMk/>
             <pc:sldMk cId="0" sldId="256"/>
@@ -335,7 +335,7 @@
           </ac:spMkLst>
         </pc:spChg>
         <pc:spChg chg="mod">
-          <ac:chgData name="Pulaski, Jordan A" userId="b59e5678-eb70-4bba-8605-0c3b286199fc" providerId="ADAL" clId="{ECF8852F-3FCF-4736-A5DC-07A8B6B99125}" dt="2026-08-06T20:32:34.961" v="1156" actId="20577"/>
+          <ac:chgData name="Pulaski, Jordan A" userId="b59e5678-eb70-4bba-8605-0c3b286199fc" providerId="ADAL" clId="{ECF8852F-3FCF-4736-A5DC-07A8B6B99125}" dt="2026-08-07T08:54:19.385" v="1422" actId="14100"/>
           <ac:spMkLst>
             <pc:docMk/>
             <pc:sldMk cId="0" sldId="256"/>
@@ -391,7 +391,7 @@
           </ac:spMkLst>
         </pc:spChg>
         <pc:spChg chg="mod">
-          <ac:chgData name="Pulaski, Jordan A" userId="b59e5678-eb70-4bba-8605-0c3b286199fc" providerId="ADAL" clId="{ECF8852F-3FCF-4736-A5DC-07A8B6B99125}" dt="2026-08-06T20:30:45.276" v="1139" actId="1076"/>
+          <ac:chgData name="Pulaski, Jordan A" userId="b59e5678-eb70-4bba-8605-0c3b286199fc" providerId="ADAL" clId="{ECF8852F-3FCF-4736-A5DC-07A8B6B99125}" dt="2026-08-07T08:55:23.097" v="1436" actId="20577"/>
           <ac:spMkLst>
             <pc:docMk/>
             <pc:sldMk cId="0" sldId="256"/>
@@ -399,7 +399,7 @@
           </ac:spMkLst>
         </pc:spChg>
         <pc:spChg chg="mod">
-          <ac:chgData name="Pulaski, Jordan A" userId="b59e5678-eb70-4bba-8605-0c3b286199fc" providerId="ADAL" clId="{ECF8852F-3FCF-4736-A5DC-07A8B6B99125}" dt="2026-08-04T23:07:38.296" v="849" actId="1076"/>
+          <ac:chgData name="Pulaski, Jordan A" userId="b59e5678-eb70-4bba-8605-0c3b286199fc" providerId="ADAL" clId="{ECF8852F-3FCF-4736-A5DC-07A8B6B99125}" dt="2026-08-07T08:54:08.455" v="1421" actId="14100"/>
           <ac:spMkLst>
             <pc:docMk/>
             <pc:sldMk cId="0" sldId="256"/>
@@ -455,7 +455,7 @@
           </ac:spMkLst>
         </pc:spChg>
         <pc:spChg chg="mod">
-          <ac:chgData name="Pulaski, Jordan A" userId="b59e5678-eb70-4bba-8605-0c3b286199fc" providerId="ADAL" clId="{ECF8852F-3FCF-4736-A5DC-07A8B6B99125}" dt="2026-08-06T20:30:26.350" v="1136" actId="14100"/>
+          <ac:chgData name="Pulaski, Jordan A" userId="b59e5678-eb70-4bba-8605-0c3b286199fc" providerId="ADAL" clId="{ECF8852F-3FCF-4736-A5DC-07A8B6B99125}" dt="2026-08-07T08:51:25.833" v="1287" actId="14100"/>
           <ac:spMkLst>
             <pc:docMk/>
             <pc:sldMk cId="0" sldId="256"/>
@@ -4838,8 +4838,8 @@
         </p:nvSpPr>
         <p:spPr bwMode="auto">
           <a:xfrm>
-            <a:off x="29285716" y="5100825"/>
-            <a:ext cx="13790811" cy="803894"/>
+            <a:off x="29625700" y="5110658"/>
+            <a:ext cx="13432915" cy="803894"/>
           </a:xfrm>
           <a:prstGeom prst="rect">
             <a:avLst/>
@@ -4896,8 +4896,8 @@
         </p:nvSpPr>
         <p:spPr bwMode="auto">
           <a:xfrm>
-            <a:off x="29352242" y="5885081"/>
-            <a:ext cx="6749613" cy="7165333"/>
+            <a:off x="29718000" y="6000340"/>
+            <a:ext cx="6672819" cy="7165333"/>
           </a:xfrm>
           <a:prstGeom prst="rect">
             <a:avLst/>
@@ -5009,7 +5009,7 @@
                 <a:latin typeface="Arial" pitchFamily="34" charset="0"/>
                 <a:cs typeface="Arial" pitchFamily="34" charset="0"/>
               </a:rPr>
-              <a:t>In the adjusted primary model:  current participation associated with 0.108-point higher Hybrid HWM score than planned participation (95% CI, 0.001–0.216; </a:t>
+              <a:t>In the adjusted primary model, current participation was associated with a 0.108-point higher Hybrid HWM score than planned participation (95% CI, 0.001–0.216; </a:t>
             </a:r>
             <a:r>
               <a:rPr lang="en-US" sz="3400" i="1" dirty="0">
@@ -5039,7 +5039,7 @@
         <p:spPr bwMode="auto">
           <a:xfrm>
             <a:off x="223625" y="5089573"/>
-            <a:ext cx="13786253" cy="794358"/>
+            <a:ext cx="13807777" cy="794358"/>
           </a:xfrm>
           <a:prstGeom prst="rect">
             <a:avLst/>
@@ -5089,7 +5089,7 @@
         <p:spPr bwMode="auto">
           <a:xfrm>
             <a:off x="14263394" y="5096746"/>
-            <a:ext cx="14768806" cy="794358"/>
+            <a:ext cx="14983096" cy="794358"/>
           </a:xfrm>
           <a:prstGeom prst="rect">
             <a:avLst/>
@@ -5147,7 +5147,7 @@
         <p:spPr bwMode="auto">
           <a:xfrm>
             <a:off x="14263394" y="10656283"/>
-            <a:ext cx="15032322" cy="4333789"/>
+            <a:ext cx="14983097" cy="4333789"/>
           </a:xfrm>
           <a:prstGeom prst="rect">
             <a:avLst/>
@@ -5225,7 +5225,7 @@
                 <a:latin typeface="Arial" pitchFamily="34" charset="0"/>
                 <a:cs typeface="Arial" pitchFamily="34" charset="0"/>
               </a:rPr>
-              <a:t> Adjusted OLS models compared current and neither status with planned participation, controlling for national network, EHR vendor network, and HIO participation, log CMS denominator (total eligible patient population), state, and survey year. </a:t>
+              <a:t> Adjusted OLS models compared current TEFCA and neither-current-nor-planned TEFCA hospitals with planned hospitals, controlling for national network, EHR vendor network, and HIO participation, log CMS denominator (total eligible patient population), state, and survey year. </a:t>
             </a:r>
             <a:r>
               <a:rPr lang="en-US" sz="2700" i="1" dirty="0">
@@ -5371,7 +5371,7 @@
         <p:spPr bwMode="auto">
           <a:xfrm>
             <a:off x="258627" y="5792339"/>
-            <a:ext cx="13751251" cy="7426943"/>
+            <a:ext cx="13807777" cy="7426943"/>
           </a:xfrm>
           <a:prstGeom prst="rect">
             <a:avLst/>
@@ -5456,7 +5456,7 @@
                 <a:latin typeface="Arial" pitchFamily="34" charset="0"/>
                 <a:cs typeface="Arial" pitchFamily="34" charset="0"/>
               </a:rPr>
-              <a:t>Determine whether U.S. non-federal acute care hospitals participating in TEFCA, versus hospitals planning to participate, were associated with lower mortality. The primary outcome was CMS Hybrid Hospital-Wide Mortality (Hybrid HWM); heart failure and pneumonia mortality were secondary outcomes</a:t>
+              <a:t>Determine whether U.S. non-federal acute care hospitals participating in TEFCA (current), versus hospitals with planned participation (planned), were associated with lower mortality. The primary outcome was CMS Hybrid Hospital-Wide Mortality (Hybrid HWM); heart failure and pneumonia mortality were secondary outcomes</a:t>
             </a:r>
           </a:p>
         </p:txBody>
@@ -6985,8 +6985,8 @@
         </p:nvSpPr>
         <p:spPr>
           <a:xfrm>
-            <a:off x="36410068" y="5970427"/>
-            <a:ext cx="6749612" cy="6894195"/>
+            <a:off x="36804600" y="5970427"/>
+            <a:ext cx="6355080" cy="7417415"/>
           </a:xfrm>
           <a:prstGeom prst="rect">
             <a:avLst/>
@@ -7037,7 +7037,7 @@
             </a:r>
             <a:r>
               <a:rPr lang="en-US" sz="3400" dirty="0"/>
-              <a:t> = .114). Participation in EHR vendor networks and larger CMS denominators associated with lower Hybrid HWM scores.</a:t>
+              <a:t> = .114). Participation in EHR vendor networks and larger CMS denominators was associated with lower Hybrid HWM scores.</a:t>
             </a:r>
           </a:p>
         </p:txBody>
@@ -7056,8 +7056,8 @@
         </p:nvSpPr>
         <p:spPr>
           <a:xfrm>
-            <a:off x="29308416" y="13290632"/>
-            <a:ext cx="13790811" cy="1477328"/>
+            <a:off x="29643612" y="13290632"/>
+            <a:ext cx="13455615" cy="1477328"/>
           </a:xfrm>
           <a:prstGeom prst="rect">
             <a:avLst/>
